--- a/files/meta-teaching/Lecture1.pptx
+++ b/files/meta-teaching/Lecture1.pptx
@@ -6,7 +6,7 @@
     <p:sldMasterId id="2147483662" r:id="rId2"/>
   </p:sldMasterIdLst>
   <p:notesMasterIdLst>
-    <p:notesMasterId r:id="rId22"/>
+    <p:notesMasterId r:id="rId23"/>
   </p:notesMasterIdLst>
   <p:sldIdLst>
     <p:sldId id="283" r:id="rId3"/>
@@ -14,25 +14,26 @@
     <p:sldId id="324" r:id="rId5"/>
     <p:sldId id="307" r:id="rId6"/>
     <p:sldId id="331" r:id="rId7"/>
-    <p:sldId id="318" r:id="rId8"/>
-    <p:sldId id="275" r:id="rId9"/>
-    <p:sldId id="320" r:id="rId10"/>
-    <p:sldId id="319" r:id="rId11"/>
-    <p:sldId id="321" r:id="rId12"/>
-    <p:sldId id="322" r:id="rId13"/>
-    <p:sldId id="308" r:id="rId14"/>
-    <p:sldId id="327" r:id="rId15"/>
-    <p:sldId id="325" r:id="rId16"/>
-    <p:sldId id="326" r:id="rId17"/>
-    <p:sldId id="328" r:id="rId18"/>
-    <p:sldId id="329" r:id="rId19"/>
-    <p:sldId id="330" r:id="rId20"/>
-    <p:sldId id="303" r:id="rId21"/>
+    <p:sldId id="332" r:id="rId8"/>
+    <p:sldId id="318" r:id="rId9"/>
+    <p:sldId id="275" r:id="rId10"/>
+    <p:sldId id="320" r:id="rId11"/>
+    <p:sldId id="319" r:id="rId12"/>
+    <p:sldId id="321" r:id="rId13"/>
+    <p:sldId id="322" r:id="rId14"/>
+    <p:sldId id="308" r:id="rId15"/>
+    <p:sldId id="327" r:id="rId16"/>
+    <p:sldId id="325" r:id="rId17"/>
+    <p:sldId id="326" r:id="rId18"/>
+    <p:sldId id="328" r:id="rId19"/>
+    <p:sldId id="329" r:id="rId20"/>
+    <p:sldId id="330" r:id="rId21"/>
+    <p:sldId id="303" r:id="rId22"/>
   </p:sldIdLst>
   <p:sldSz cx="12192000" cy="6858000"/>
   <p:notesSz cx="6858000" cy="9144000"/>
   <p:custDataLst>
-    <p:tags r:id="rId23"/>
+    <p:tags r:id="rId24"/>
   </p:custDataLst>
   <p:defaultTextStyle>
     <a:defPPr>
@@ -230,7 +231,7 @@
           <a:p>
             <a:fld id="{9F6D67DF-CF82-44E4-9FB6-564B8C4C207B}" type="datetimeFigureOut">
               <a:rPr lang="zh-CN" altLang="en-US" smtClean="0"/>
-              <a:t>2024/5/16</a:t>
+              <a:t>2024/9/22</a:t>
             </a:fld>
             <a:endParaRPr lang="zh-CN" altLang="en-US"/>
           </a:p>
@@ -735,7 +736,7 @@
           <a:p>
             <a:fld id="{7E79BF44-F5CE-455C-A9FE-73A15FC422D4}" type="slidenum">
               <a:rPr lang="zh-CN" altLang="en-US" smtClean="0"/>
-              <a:t>7</a:t>
+              <a:t>8</a:t>
             </a:fld>
             <a:endParaRPr lang="zh-CN" altLang="en-US"/>
           </a:p>
@@ -819,7 +820,7 @@
           <a:p>
             <a:fld id="{7E79BF44-F5CE-455C-A9FE-73A15FC422D4}" type="slidenum">
               <a:rPr lang="zh-CN" altLang="en-US" smtClean="0"/>
-              <a:t>9</a:t>
+              <a:t>10</a:t>
             </a:fld>
             <a:endParaRPr lang="zh-CN" altLang="en-US"/>
           </a:p>
@@ -903,7 +904,7 @@
           <a:p>
             <a:fld id="{7E79BF44-F5CE-455C-A9FE-73A15FC422D4}" type="slidenum">
               <a:rPr lang="zh-CN" altLang="en-US" smtClean="0"/>
-              <a:t>12</a:t>
+              <a:t>13</a:t>
             </a:fld>
             <a:endParaRPr lang="zh-CN" altLang="en-US"/>
           </a:p>
@@ -987,7 +988,7 @@
           <a:p>
             <a:fld id="{7E79BF44-F5CE-455C-A9FE-73A15FC422D4}" type="slidenum">
               <a:rPr lang="zh-CN" altLang="en-US" smtClean="0"/>
-              <a:t>17</a:t>
+              <a:t>18</a:t>
             </a:fld>
             <a:endParaRPr lang="zh-CN" altLang="en-US"/>
           </a:p>
@@ -1071,7 +1072,7 @@
           <a:p>
             <a:fld id="{7E79BF44-F5CE-455C-A9FE-73A15FC422D4}" type="slidenum">
               <a:rPr lang="zh-CN" altLang="en-US" smtClean="0"/>
-              <a:t>19</a:t>
+              <a:t>20</a:t>
             </a:fld>
             <a:endParaRPr lang="zh-CN" altLang="en-US"/>
           </a:p>
@@ -1237,7 +1238,7 @@
           <a:p>
             <a:fld id="{C18EDF5E-578C-4F7F-BA8F-EE7896D35C60}" type="datetimeFigureOut">
               <a:rPr lang="zh-CN" altLang="en-US" smtClean="0"/>
-              <a:t>2024/5/16</a:t>
+              <a:t>2024/9/22</a:t>
             </a:fld>
             <a:endParaRPr lang="zh-CN" altLang="en-US"/>
           </a:p>
@@ -1537,7 +1538,7 @@
           <a:p>
             <a:fld id="{C18EDF5E-578C-4F7F-BA8F-EE7896D35C60}" type="datetimeFigureOut">
               <a:rPr lang="zh-CN" altLang="en-US" smtClean="0"/>
-              <a:t>2024/5/16</a:t>
+              <a:t>2024/9/22</a:t>
             </a:fld>
             <a:endParaRPr lang="zh-CN" altLang="en-US"/>
           </a:p>
@@ -1747,7 +1748,7 @@
           <a:p>
             <a:fld id="{C18EDF5E-578C-4F7F-BA8F-EE7896D35C60}" type="datetimeFigureOut">
               <a:rPr lang="zh-CN" altLang="en-US" smtClean="0"/>
-              <a:t>2024/5/16</a:t>
+              <a:t>2024/9/22</a:t>
             </a:fld>
             <a:endParaRPr lang="zh-CN" altLang="en-US"/>
           </a:p>
@@ -1967,7 +1968,7 @@
           <a:p>
             <a:fld id="{C18EDF5E-578C-4F7F-BA8F-EE7896D35C60}" type="datetimeFigureOut">
               <a:rPr lang="zh-CN" altLang="en-US" smtClean="0"/>
-              <a:t>2024/5/16</a:t>
+              <a:t>2024/9/22</a:t>
             </a:fld>
             <a:endParaRPr lang="zh-CN" altLang="en-US"/>
           </a:p>
@@ -2086,7 +2087,7 @@
           <a:p>
             <a:fld id="{D67E1CCE-4C69-481E-8A82-8C3A41A945F4}" type="datetimeFigureOut">
               <a:rPr lang="zh-CN" altLang="en-US" smtClean="0"/>
-              <a:t>2024/5/16</a:t>
+              <a:t>2024/9/22</a:t>
             </a:fld>
             <a:endParaRPr lang="zh-CN" altLang="en-US"/>
           </a:p>
@@ -2854,7 +2855,7 @@
                 </a:solidFill>
               </a:rPr>
               <a:pPr/>
-              <a:t>2024/5/16</a:t>
+              <a:t>2024/9/22</a:t>
             </a:fld>
             <a:endParaRPr lang="zh-CN" altLang="en-US">
               <a:solidFill>
@@ -3084,7 +3085,7 @@
                 </a:solidFill>
               </a:rPr>
               <a:pPr/>
-              <a:t>2024/5/16</a:t>
+              <a:t>2024/9/22</a:t>
             </a:fld>
             <a:endParaRPr lang="zh-CN" altLang="en-US">
               <a:solidFill>
@@ -3333,7 +3334,7 @@
           <a:p>
             <a:fld id="{C18EDF5E-578C-4F7F-BA8F-EE7896D35C60}" type="datetimeFigureOut">
               <a:rPr lang="zh-CN" altLang="en-US" smtClean="0"/>
-              <a:t>2024/5/16</a:t>
+              <a:t>2024/9/22</a:t>
             </a:fld>
             <a:endParaRPr lang="zh-CN" altLang="en-US"/>
           </a:p>
@@ -3620,7 +3621,7 @@
           <a:p>
             <a:fld id="{C18EDF5E-578C-4F7F-BA8F-EE7896D35C60}" type="datetimeFigureOut">
               <a:rPr lang="zh-CN" altLang="en-US" smtClean="0"/>
-              <a:t>2024/5/16</a:t>
+              <a:t>2024/9/22</a:t>
             </a:fld>
             <a:endParaRPr lang="zh-CN" altLang="en-US"/>
           </a:p>
@@ -3897,7 +3898,7 @@
           <a:p>
             <a:fld id="{C18EDF5E-578C-4F7F-BA8F-EE7896D35C60}" type="datetimeFigureOut">
               <a:rPr lang="zh-CN" altLang="en-US" smtClean="0"/>
-              <a:t>2024/5/16</a:t>
+              <a:t>2024/9/22</a:t>
             </a:fld>
             <a:endParaRPr lang="zh-CN" altLang="en-US"/>
           </a:p>
@@ -4321,7 +4322,7 @@
           <a:p>
             <a:fld id="{C18EDF5E-578C-4F7F-BA8F-EE7896D35C60}" type="datetimeFigureOut">
               <a:rPr lang="zh-CN" altLang="en-US" smtClean="0"/>
-              <a:t>2024/5/16</a:t>
+              <a:t>2024/9/22</a:t>
             </a:fld>
             <a:endParaRPr lang="zh-CN" altLang="en-US"/>
           </a:p>
@@ -4745,7 +4746,7 @@
           <a:p>
             <a:fld id="{C18EDF5E-578C-4F7F-BA8F-EE7896D35C60}" type="datetimeFigureOut">
               <a:rPr lang="zh-CN" altLang="en-US" smtClean="0"/>
-              <a:t>2024/5/16</a:t>
+              <a:t>2024/9/22</a:t>
             </a:fld>
             <a:endParaRPr lang="zh-CN" altLang="en-US"/>
           </a:p>
@@ -4999,7 +5000,7 @@
           <a:p>
             <a:fld id="{C18EDF5E-578C-4F7F-BA8F-EE7896D35C60}" type="datetimeFigureOut">
               <a:rPr lang="zh-CN" altLang="en-US" smtClean="0"/>
-              <a:t>2024/5/16</a:t>
+              <a:t>2024/9/22</a:t>
             </a:fld>
             <a:endParaRPr lang="zh-CN" altLang="en-US"/>
           </a:p>
@@ -5124,7 +5125,7 @@
           <a:p>
             <a:fld id="{C18EDF5E-578C-4F7F-BA8F-EE7896D35C60}" type="datetimeFigureOut">
               <a:rPr lang="zh-CN" altLang="en-US" smtClean="0"/>
-              <a:t>2024/5/16</a:t>
+              <a:t>2024/9/22</a:t>
             </a:fld>
             <a:endParaRPr lang="zh-CN" altLang="en-US"/>
           </a:p>
@@ -5447,7 +5448,7 @@
           <a:p>
             <a:fld id="{C18EDF5E-578C-4F7F-BA8F-EE7896D35C60}" type="datetimeFigureOut">
               <a:rPr lang="zh-CN" altLang="en-US" smtClean="0"/>
-              <a:t>2024/5/16</a:t>
+              <a:t>2024/9/22</a:t>
             </a:fld>
             <a:endParaRPr lang="zh-CN" altLang="en-US"/>
           </a:p>
@@ -5709,7 +5710,7 @@
           <a:p>
             <a:fld id="{C18EDF5E-578C-4F7F-BA8F-EE7896D35C60}" type="datetimeFigureOut">
               <a:rPr lang="zh-CN" altLang="en-US" smtClean="0"/>
-              <a:t>2024/5/16</a:t>
+              <a:t>2024/9/22</a:t>
             </a:fld>
             <a:endParaRPr lang="zh-CN" altLang="en-US"/>
           </a:p>
@@ -6951,6 +6952,725 @@
       </p:grpSpPr>
       <p:sp>
         <p:nvSpPr>
+          <p:cNvPr id="70" name="矩形 10"/>
+          <p:cNvSpPr>
+            <a:spLocks noChangeAspect="1"/>
+          </p:cNvSpPr>
+          <p:nvPr/>
+        </p:nvSpPr>
+        <p:spPr>
+          <a:xfrm>
+            <a:off x="4751851" y="1604797"/>
+            <a:ext cx="2496277" cy="2185899"/>
+          </a:xfrm>
+          <a:prstGeom prst="hexagon">
+            <a:avLst/>
+          </a:prstGeom>
+          <a:solidFill>
+            <a:srgbClr val="2B3E54"/>
+          </a:solidFill>
+          <a:ln w="15875">
+            <a:noFill/>
+          </a:ln>
+          <a:effectLst/>
+        </p:spPr>
+        <p:style>
+          <a:lnRef idx="2">
+            <a:schemeClr val="accent1">
+              <a:shade val="50000"/>
+            </a:schemeClr>
+          </a:lnRef>
+          <a:fillRef idx="1">
+            <a:schemeClr val="accent1"/>
+          </a:fillRef>
+          <a:effectRef idx="0">
+            <a:schemeClr val="accent1"/>
+          </a:effectRef>
+          <a:fontRef idx="minor">
+            <a:schemeClr val="lt1"/>
+          </a:fontRef>
+        </p:style>
+        <p:txBody>
+          <a:bodyPr anchor="ctr"/>
+          <a:lstStyle/>
+          <a:p>
+            <a:pPr algn="ctr"/>
+            <a:endParaRPr lang="zh-CN" altLang="en-US" sz="2400" dirty="0">
+              <a:solidFill>
+                <a:prstClr val="white"/>
+              </a:solidFill>
+              <a:cs typeface="+mn-ea"/>
+              <a:sym typeface="+mn-lt"/>
+            </a:endParaRPr>
+          </a:p>
+        </p:txBody>
+      </p:sp>
+      <p:sp>
+        <p:nvSpPr>
+          <p:cNvPr id="67" name="文本框 8"/>
+          <p:cNvSpPr>
+            <a:spLocks noChangeArrowheads="1"/>
+          </p:cNvSpPr>
+          <p:nvPr/>
+        </p:nvSpPr>
+        <p:spPr bwMode="auto">
+          <a:xfrm>
+            <a:off x="3270373" y="4188701"/>
+            <a:ext cx="6095299" cy="1733664"/>
+          </a:xfrm>
+          <a:prstGeom prst="rect">
+            <a:avLst/>
+          </a:prstGeom>
+          <a:noFill/>
+          <a:ln>
+            <a:noFill/>
+          </a:ln>
+          <a:effectLst/>
+          <a:extLst>
+            <a:ext uri="{909E8E84-426E-40DD-AFC4-6F175D3DCCD1}">
+              <a14:hiddenFill xmlns:a14="http://schemas.microsoft.com/office/drawing/2010/main">
+                <a:solidFill>
+                  <a:srgbClr val="FFFFFF"/>
+                </a:solidFill>
+              </a14:hiddenFill>
+            </a:ext>
+            <a:ext uri="{91240B29-F687-4F45-9708-019B960494DF}">
+              <a14:hiddenLine xmlns:a14="http://schemas.microsoft.com/office/drawing/2010/main" w="9525">
+                <a:solidFill>
+                  <a:srgbClr val="000000"/>
+                </a:solidFill>
+                <a:bevel/>
+                <a:headEnd/>
+                <a:tailEnd/>
+              </a14:hiddenLine>
+            </a:ext>
+          </a:extLst>
+        </p:spPr>
+        <p:txBody>
+          <a:bodyPr wrap="square" lIns="91421" tIns="45712" rIns="91421" bIns="45712">
+            <a:spAutoFit/>
+          </a:bodyPr>
+          <a:lstStyle/>
+          <a:p>
+            <a:pPr algn="ctr">
+              <a:defRPr/>
+            </a:pPr>
+            <a:r>
+              <a:rPr lang="zh-CN" altLang="en-US" sz="5333" b="1" kern="100" dirty="0">
+                <a:solidFill>
+                  <a:schemeClr val="tx1">
+                    <a:lumMod val="65000"/>
+                    <a:lumOff val="35000"/>
+                  </a:schemeClr>
+                </a:solidFill>
+                <a:cs typeface="+mn-ea"/>
+                <a:sym typeface="+mn-lt"/>
+              </a:rPr>
+              <a:t>环境变量与</a:t>
+            </a:r>
+            <a:endParaRPr lang="en-US" altLang="zh-CN" sz="5333" b="1" kern="100" dirty="0">
+              <a:solidFill>
+                <a:schemeClr val="tx1">
+                  <a:lumMod val="65000"/>
+                  <a:lumOff val="35000"/>
+                </a:schemeClr>
+              </a:solidFill>
+              <a:cs typeface="+mn-ea"/>
+              <a:sym typeface="+mn-lt"/>
+            </a:endParaRPr>
+          </a:p>
+          <a:p>
+            <a:pPr algn="ctr">
+              <a:defRPr/>
+            </a:pPr>
+            <a:r>
+              <a:rPr lang="en-US" altLang="zh-CN" sz="5333" b="1" kern="100" dirty="0">
+                <a:solidFill>
+                  <a:schemeClr val="tx1">
+                    <a:lumMod val="65000"/>
+                    <a:lumOff val="35000"/>
+                  </a:schemeClr>
+                </a:solidFill>
+                <a:cs typeface="+mn-ea"/>
+                <a:sym typeface="+mn-lt"/>
+              </a:rPr>
+              <a:t>C</a:t>
+            </a:r>
+            <a:r>
+              <a:rPr lang="zh-CN" altLang="en-US" sz="5333" b="1" kern="100" dirty="0">
+                <a:solidFill>
+                  <a:schemeClr val="tx1">
+                    <a:lumMod val="65000"/>
+                    <a:lumOff val="35000"/>
+                  </a:schemeClr>
+                </a:solidFill>
+                <a:cs typeface="+mn-ea"/>
+                <a:sym typeface="+mn-lt"/>
+              </a:rPr>
+              <a:t>语言编译器</a:t>
+            </a:r>
+            <a:endParaRPr lang="zh-CN" altLang="zh-CN" sz="3000" b="1" kern="100" dirty="0">
+              <a:solidFill>
+                <a:schemeClr val="tx1">
+                  <a:lumMod val="65000"/>
+                  <a:lumOff val="35000"/>
+                </a:schemeClr>
+              </a:solidFill>
+              <a:cs typeface="+mn-ea"/>
+              <a:sym typeface="+mn-lt"/>
+            </a:endParaRPr>
+          </a:p>
+        </p:txBody>
+      </p:sp>
+      <p:sp>
+        <p:nvSpPr>
+          <p:cNvPr id="71" name="矩形 10"/>
+          <p:cNvSpPr>
+            <a:spLocks noChangeAspect="1"/>
+          </p:cNvSpPr>
+          <p:nvPr/>
+        </p:nvSpPr>
+        <p:spPr>
+          <a:xfrm>
+            <a:off x="6483819" y="3263650"/>
+            <a:ext cx="956331" cy="837424"/>
+          </a:xfrm>
+          <a:prstGeom prst="hexagon">
+            <a:avLst/>
+          </a:prstGeom>
+          <a:solidFill>
+            <a:srgbClr val="2B3E54"/>
+          </a:solidFill>
+          <a:ln w="15875">
+            <a:gradFill>
+              <a:gsLst>
+                <a:gs pos="100000">
+                  <a:schemeClr val="bg1">
+                    <a:lumMod val="85000"/>
+                  </a:schemeClr>
+                </a:gs>
+                <a:gs pos="0">
+                  <a:schemeClr val="bg1"/>
+                </a:gs>
+              </a:gsLst>
+              <a:lin ang="8100000" scaled="0"/>
+            </a:gradFill>
+          </a:ln>
+          <a:effectLst/>
+        </p:spPr>
+        <p:style>
+          <a:lnRef idx="2">
+            <a:schemeClr val="accent1">
+              <a:shade val="50000"/>
+            </a:schemeClr>
+          </a:lnRef>
+          <a:fillRef idx="1">
+            <a:schemeClr val="accent1"/>
+          </a:fillRef>
+          <a:effectRef idx="0">
+            <a:schemeClr val="accent1"/>
+          </a:effectRef>
+          <a:fontRef idx="minor">
+            <a:schemeClr val="lt1"/>
+          </a:fontRef>
+        </p:style>
+        <p:txBody>
+          <a:bodyPr anchor="ctr"/>
+          <a:lstStyle/>
+          <a:p>
+            <a:pPr algn="ctr"/>
+            <a:endParaRPr lang="zh-CN" altLang="en-US" sz="2400" dirty="0">
+              <a:solidFill>
+                <a:prstClr val="white"/>
+              </a:solidFill>
+              <a:cs typeface="+mn-ea"/>
+              <a:sym typeface="+mn-lt"/>
+            </a:endParaRPr>
+          </a:p>
+        </p:txBody>
+      </p:sp>
+      <p:sp>
+        <p:nvSpPr>
+          <p:cNvPr id="74" name="TextBox 73"/>
+          <p:cNvSpPr txBox="1"/>
+          <p:nvPr/>
+        </p:nvSpPr>
+        <p:spPr>
+          <a:xfrm>
+            <a:off x="6563862" y="3351277"/>
+            <a:ext cx="745717" cy="666786"/>
+          </a:xfrm>
+          <a:prstGeom prst="rect">
+            <a:avLst/>
+          </a:prstGeom>
+          <a:noFill/>
+        </p:spPr>
+        <p:txBody>
+          <a:bodyPr wrap="none" rtlCol="0">
+            <a:spAutoFit/>
+          </a:bodyPr>
+          <a:lstStyle/>
+          <a:p>
+            <a:r>
+              <a:rPr lang="en-US" altLang="zh-CN" sz="3733" dirty="0">
+                <a:solidFill>
+                  <a:schemeClr val="bg1"/>
+                </a:solidFill>
+                <a:cs typeface="+mn-ea"/>
+                <a:sym typeface="+mn-lt"/>
+              </a:rPr>
+              <a:t>02</a:t>
+            </a:r>
+            <a:endParaRPr lang="zh-CN" altLang="en-US" sz="3733" dirty="0">
+              <a:solidFill>
+                <a:schemeClr val="bg1"/>
+              </a:solidFill>
+              <a:cs typeface="+mn-ea"/>
+              <a:sym typeface="+mn-lt"/>
+            </a:endParaRPr>
+          </a:p>
+        </p:txBody>
+      </p:sp>
+    </p:spTree>
+    <p:extLst>
+      <p:ext uri="{BB962C8B-B14F-4D97-AF65-F5344CB8AC3E}">
+        <p14:creationId xmlns:p14="http://schemas.microsoft.com/office/powerpoint/2010/main" val="2992375368"/>
+      </p:ext>
+    </p:extLst>
+  </p:cSld>
+  <p:clrMapOvr>
+    <a:masterClrMapping/>
+  </p:clrMapOvr>
+  <mc:AlternateContent xmlns:mc="http://schemas.openxmlformats.org/markup-compatibility/2006" xmlns:p14="http://schemas.microsoft.com/office/powerpoint/2010/main">
+    <mc:Choice Requires="p14">
+      <p:transition spd="slow" p14:dur="1600" advTm="1481">
+        <p:blinds dir="vert"/>
+      </p:transition>
+    </mc:Choice>
+    <mc:Fallback xmlns="">
+      <p:transition spd="slow" advTm="1481">
+        <p:blinds dir="vert"/>
+      </p:transition>
+    </mc:Fallback>
+  </mc:AlternateContent>
+  <mc:AlternateContent xmlns:mc="http://schemas.openxmlformats.org/markup-compatibility/2006" xmlns:p14="http://schemas.microsoft.com/office/powerpoint/2010/main">
+    <mc:Choice Requires="p14">
+      <p:timing>
+        <p:tnLst>
+          <p:par>
+            <p:cTn id="1" dur="indefinite" restart="never" nodeType="tmRoot">
+              <p:childTnLst>
+                <p:seq concurrent="1" nextAc="seek">
+                  <p:cTn id="2" dur="indefinite" nodeType="mainSeq">
+                    <p:childTnLst>
+                      <p:par>
+                        <p:cTn id="3" fill="hold">
+                          <p:stCondLst>
+                            <p:cond delay="indefinite"/>
+                            <p:cond evt="onBegin" delay="0">
+                              <p:tn val="2"/>
+                            </p:cond>
+                          </p:stCondLst>
+                          <p:childTnLst>
+                            <p:par>
+                              <p:cTn id="4" fill="hold">
+                                <p:stCondLst>
+                                  <p:cond delay="0"/>
+                                </p:stCondLst>
+                                <p:childTnLst>
+                                  <p:par>
+                                    <p:cTn id="5" presetID="2" presetClass="entr" presetSubtype="12" fill="hold" grpId="0" nodeType="afterEffect" p14:presetBounceEnd="50000">
+                                      <p:stCondLst>
+                                        <p:cond delay="0"/>
+                                      </p:stCondLst>
+                                      <p:childTnLst>
+                                        <p:set>
+                                          <p:cBhvr>
+                                            <p:cTn id="6" dur="1" fill="hold">
+                                              <p:stCondLst>
+                                                <p:cond delay="0"/>
+                                              </p:stCondLst>
+                                            </p:cTn>
+                                            <p:tgtEl>
+                                              <p:spTgt spid="70"/>
+                                            </p:tgtEl>
+                                            <p:attrNameLst>
+                                              <p:attrName>style.visibility</p:attrName>
+                                            </p:attrNameLst>
+                                          </p:cBhvr>
+                                          <p:to>
+                                            <p:strVal val="visible"/>
+                                          </p:to>
+                                        </p:set>
+                                        <p:anim calcmode="lin" valueType="num" p14:bounceEnd="50000">
+                                          <p:cBhvr additive="base">
+                                            <p:cTn id="7" dur="1500" fill="hold"/>
+                                            <p:tgtEl>
+                                              <p:spTgt spid="70"/>
+                                            </p:tgtEl>
+                                            <p:attrNameLst>
+                                              <p:attrName>ppt_x</p:attrName>
+                                            </p:attrNameLst>
+                                          </p:cBhvr>
+                                          <p:tavLst>
+                                            <p:tav tm="0">
+                                              <p:val>
+                                                <p:strVal val="0-#ppt_w/2"/>
+                                              </p:val>
+                                            </p:tav>
+                                            <p:tav tm="100000">
+                                              <p:val>
+                                                <p:strVal val="#ppt_x"/>
+                                              </p:val>
+                                            </p:tav>
+                                          </p:tavLst>
+                                        </p:anim>
+                                        <p:anim calcmode="lin" valueType="num" p14:bounceEnd="50000">
+                                          <p:cBhvr additive="base">
+                                            <p:cTn id="8" dur="1500" fill="hold"/>
+                                            <p:tgtEl>
+                                              <p:spTgt spid="70"/>
+                                            </p:tgtEl>
+                                            <p:attrNameLst>
+                                              <p:attrName>ppt_y</p:attrName>
+                                            </p:attrNameLst>
+                                          </p:cBhvr>
+                                          <p:tavLst>
+                                            <p:tav tm="0">
+                                              <p:val>
+                                                <p:strVal val="1+#ppt_h/2"/>
+                                              </p:val>
+                                            </p:tav>
+                                            <p:tav tm="100000">
+                                              <p:val>
+                                                <p:strVal val="#ppt_y"/>
+                                              </p:val>
+                                            </p:tav>
+                                          </p:tavLst>
+                                        </p:anim>
+                                      </p:childTnLst>
+                                    </p:cTn>
+                                  </p:par>
+                                </p:childTnLst>
+                              </p:cTn>
+                            </p:par>
+                            <p:par>
+                              <p:cTn id="9" fill="hold">
+                                <p:stCondLst>
+                                  <p:cond delay="1500"/>
+                                </p:stCondLst>
+                                <p:childTnLst>
+                                  <p:par>
+                                    <p:cTn id="10" presetID="12" presetClass="entr" presetSubtype="4" fill="hold" grpId="0" nodeType="afterEffect">
+                                      <p:stCondLst>
+                                        <p:cond delay="0"/>
+                                      </p:stCondLst>
+                                      <p:childTnLst>
+                                        <p:set>
+                                          <p:cBhvr>
+                                            <p:cTn id="11" dur="1" fill="hold">
+                                              <p:stCondLst>
+                                                <p:cond delay="0"/>
+                                              </p:stCondLst>
+                                            </p:cTn>
+                                            <p:tgtEl>
+                                              <p:spTgt spid="67"/>
+                                            </p:tgtEl>
+                                            <p:attrNameLst>
+                                              <p:attrName>style.visibility</p:attrName>
+                                            </p:attrNameLst>
+                                          </p:cBhvr>
+                                          <p:to>
+                                            <p:strVal val="visible"/>
+                                          </p:to>
+                                        </p:set>
+                                        <p:anim calcmode="lin" valueType="num">
+                                          <p:cBhvr>
+                                            <p:cTn id="12" dur="500"/>
+                                            <p:tgtEl>
+                                              <p:spTgt spid="67"/>
+                                            </p:tgtEl>
+                                            <p:attrNameLst>
+                                              <p:attrName>ppt_y</p:attrName>
+                                            </p:attrNameLst>
+                                          </p:cBhvr>
+                                          <p:tavLst>
+                                            <p:tav tm="0">
+                                              <p:val>
+                                                <p:strVal val="#ppt_y+#ppt_h*1.125000"/>
+                                              </p:val>
+                                            </p:tav>
+                                            <p:tav tm="100000">
+                                              <p:val>
+                                                <p:strVal val="#ppt_y"/>
+                                              </p:val>
+                                            </p:tav>
+                                          </p:tavLst>
+                                        </p:anim>
+                                        <p:animEffect>
+                                          <p:cBhvr>
+                                            <p:cTn id="13" dur="500"/>
+                                            <p:tgtEl>
+                                              <p:spTgt spid="67"/>
+                                            </p:tgtEl>
+                                          </p:cBhvr>
+                                        </p:animEffect>
+                                      </p:childTnLst>
+                                    </p:cTn>
+                                  </p:par>
+                                </p:childTnLst>
+                              </p:cTn>
+                            </p:par>
+                          </p:childTnLst>
+                        </p:cTn>
+                      </p:par>
+                    </p:childTnLst>
+                  </p:cTn>
+                  <p:prevCondLst>
+                    <p:cond evt="onPrev" delay="0">
+                      <p:tgtEl>
+                        <p:sldTgt/>
+                      </p:tgtEl>
+                    </p:cond>
+                  </p:prevCondLst>
+                  <p:nextCondLst>
+                    <p:cond evt="onNext" delay="0">
+                      <p:tgtEl>
+                        <p:sldTgt/>
+                      </p:tgtEl>
+                    </p:cond>
+                  </p:nextCondLst>
+                </p:seq>
+              </p:childTnLst>
+            </p:cTn>
+          </p:par>
+        </p:tnLst>
+        <p:bldLst>
+          <p:bldP spid="70" grpId="0" animBg="1"/>
+          <p:bldP spid="67" grpId="0" bldLvl="0" autoUpdateAnimBg="0"/>
+        </p:bldLst>
+      </p:timing>
+    </mc:Choice>
+    <mc:Fallback xmlns="">
+      <p:timing>
+        <p:tnLst>
+          <p:par>
+            <p:cTn id="1" dur="indefinite" restart="never" nodeType="tmRoot">
+              <p:childTnLst>
+                <p:seq concurrent="1" nextAc="seek">
+                  <p:cTn id="2" dur="indefinite" nodeType="mainSeq">
+                    <p:childTnLst>
+                      <p:par>
+                        <p:cTn id="3" fill="hold">
+                          <p:stCondLst>
+                            <p:cond delay="indefinite"/>
+                            <p:cond evt="onBegin" delay="0">
+                              <p:tn val="2"/>
+                            </p:cond>
+                          </p:stCondLst>
+                          <p:childTnLst>
+                            <p:par>
+                              <p:cTn id="4" fill="hold">
+                                <p:stCondLst>
+                                  <p:cond delay="0"/>
+                                </p:stCondLst>
+                                <p:childTnLst>
+                                  <p:par>
+                                    <p:cTn id="5" presetID="2" presetClass="entr" presetSubtype="12" fill="hold" grpId="0" nodeType="afterEffect">
+                                      <p:stCondLst>
+                                        <p:cond delay="0"/>
+                                      </p:stCondLst>
+                                      <p:childTnLst>
+                                        <p:set>
+                                          <p:cBhvr>
+                                            <p:cTn id="6" dur="1" fill="hold">
+                                              <p:stCondLst>
+                                                <p:cond delay="0"/>
+                                              </p:stCondLst>
+                                            </p:cTn>
+                                            <p:tgtEl>
+                                              <p:spTgt spid="70"/>
+                                            </p:tgtEl>
+                                            <p:attrNameLst>
+                                              <p:attrName>style.visibility</p:attrName>
+                                            </p:attrNameLst>
+                                          </p:cBhvr>
+                                          <p:to>
+                                            <p:strVal val="visible"/>
+                                          </p:to>
+                                        </p:set>
+                                        <p:anim calcmode="lin" valueType="num">
+                                          <p:cBhvr additive="base">
+                                            <p:cTn id="7" dur="1500" fill="hold"/>
+                                            <p:tgtEl>
+                                              <p:spTgt spid="70"/>
+                                            </p:tgtEl>
+                                            <p:attrNameLst>
+                                              <p:attrName>ppt_x</p:attrName>
+                                            </p:attrNameLst>
+                                          </p:cBhvr>
+                                          <p:tavLst>
+                                            <p:tav tm="0">
+                                              <p:val>
+                                                <p:strVal val="0-#ppt_w/2"/>
+                                              </p:val>
+                                            </p:tav>
+                                            <p:tav tm="100000">
+                                              <p:val>
+                                                <p:strVal val="#ppt_x"/>
+                                              </p:val>
+                                            </p:tav>
+                                          </p:tavLst>
+                                        </p:anim>
+                                        <p:anim calcmode="lin" valueType="num">
+                                          <p:cBhvr additive="base">
+                                            <p:cTn id="8" dur="1500" fill="hold"/>
+                                            <p:tgtEl>
+                                              <p:spTgt spid="70"/>
+                                            </p:tgtEl>
+                                            <p:attrNameLst>
+                                              <p:attrName>ppt_y</p:attrName>
+                                            </p:attrNameLst>
+                                          </p:cBhvr>
+                                          <p:tavLst>
+                                            <p:tav tm="0">
+                                              <p:val>
+                                                <p:strVal val="1+#ppt_h/2"/>
+                                              </p:val>
+                                            </p:tav>
+                                            <p:tav tm="100000">
+                                              <p:val>
+                                                <p:strVal val="#ppt_y"/>
+                                              </p:val>
+                                            </p:tav>
+                                          </p:tavLst>
+                                        </p:anim>
+                                      </p:childTnLst>
+                                    </p:cTn>
+                                  </p:par>
+                                </p:childTnLst>
+                              </p:cTn>
+                            </p:par>
+                            <p:par>
+                              <p:cTn id="9" fill="hold">
+                                <p:stCondLst>
+                                  <p:cond delay="1500"/>
+                                </p:stCondLst>
+                                <p:childTnLst>
+                                  <p:par>
+                                    <p:cTn id="10" presetID="12" presetClass="entr" presetSubtype="4" fill="hold" grpId="0" nodeType="afterEffect">
+                                      <p:stCondLst>
+                                        <p:cond delay="0"/>
+                                      </p:stCondLst>
+                                      <p:childTnLst>
+                                        <p:set>
+                                          <p:cBhvr>
+                                            <p:cTn id="11" dur="1" fill="hold">
+                                              <p:stCondLst>
+                                                <p:cond delay="0"/>
+                                              </p:stCondLst>
+                                            </p:cTn>
+                                            <p:tgtEl>
+                                              <p:spTgt spid="67"/>
+                                            </p:tgtEl>
+                                            <p:attrNameLst>
+                                              <p:attrName>style.visibility</p:attrName>
+                                            </p:attrNameLst>
+                                          </p:cBhvr>
+                                          <p:to>
+                                            <p:strVal val="visible"/>
+                                          </p:to>
+                                        </p:set>
+                                        <p:anim calcmode="lin" valueType="num">
+                                          <p:cBhvr>
+                                            <p:cTn id="12" dur="500"/>
+                                            <p:tgtEl>
+                                              <p:spTgt spid="67"/>
+                                            </p:tgtEl>
+                                            <p:attrNameLst>
+                                              <p:attrName>ppt_y</p:attrName>
+                                            </p:attrNameLst>
+                                          </p:cBhvr>
+                                          <p:tavLst>
+                                            <p:tav tm="0">
+                                              <p:val>
+                                                <p:strVal val="#ppt_y+#ppt_h*1.125000"/>
+                                              </p:val>
+                                            </p:tav>
+                                            <p:tav tm="100000">
+                                              <p:val>
+                                                <p:strVal val="#ppt_y"/>
+                                              </p:val>
+                                            </p:tav>
+                                          </p:tavLst>
+                                        </p:anim>
+                                        <p:animEffect>
+                                          <p:cBhvr>
+                                            <p:cTn id="13" dur="500"/>
+                                            <p:tgtEl>
+                                              <p:spTgt spid="67"/>
+                                            </p:tgtEl>
+                                          </p:cBhvr>
+                                        </p:animEffect>
+                                      </p:childTnLst>
+                                    </p:cTn>
+                                  </p:par>
+                                </p:childTnLst>
+                              </p:cTn>
+                            </p:par>
+                          </p:childTnLst>
+                        </p:cTn>
+                      </p:par>
+                    </p:childTnLst>
+                  </p:cTn>
+                  <p:prevCondLst>
+                    <p:cond evt="onPrev" delay="0">
+                      <p:tgtEl>
+                        <p:sldTgt/>
+                      </p:tgtEl>
+                    </p:cond>
+                  </p:prevCondLst>
+                  <p:nextCondLst>
+                    <p:cond evt="onNext" delay="0">
+                      <p:tgtEl>
+                        <p:sldTgt/>
+                      </p:tgtEl>
+                    </p:cond>
+                  </p:nextCondLst>
+                </p:seq>
+              </p:childTnLst>
+            </p:cTn>
+          </p:par>
+        </p:tnLst>
+        <p:bldLst>
+          <p:bldP spid="70" grpId="0" animBg="1"/>
+          <p:bldP spid="67" grpId="0" bldLvl="0" autoUpdateAnimBg="0"/>
+        </p:bldLst>
+      </p:timing>
+    </mc:Fallback>
+  </mc:AlternateContent>
+</p:sld>
+</file>
+
+<file path=ppt/slides/slide11.xml><?xml version="1.0" encoding="utf-8"?>
+<p:sld xmlns:a="http://schemas.openxmlformats.org/drawingml/2006/main" xmlns:r="http://schemas.openxmlformats.org/officeDocument/2006/relationships" xmlns:p="http://schemas.openxmlformats.org/presentationml/2006/main">
+  <p:cSld>
+    <p:spTree>
+      <p:nvGrpSpPr>
+        <p:cNvPr id="1" name=""/>
+        <p:cNvGrpSpPr/>
+        <p:nvPr/>
+      </p:nvGrpSpPr>
+      <p:grpSpPr>
+        <a:xfrm>
+          <a:off x="0" y="0"/>
+          <a:ext cx="0" cy="0"/>
+          <a:chOff x="0" y="0"/>
+          <a:chExt cx="0" cy="0"/>
+        </a:xfrm>
+      </p:grpSpPr>
+      <p:sp>
+        <p:nvSpPr>
           <p:cNvPr id="2" name="Freeform 15">
             <a:extLst>
               <a:ext uri="{FF2B5EF4-FFF2-40B4-BE49-F238E27FC236}">
@@ -7718,7 +8438,7 @@
 </p:sld>
 </file>
 
-<file path=ppt/slides/slide11.xml><?xml version="1.0" encoding="utf-8"?>
+<file path=ppt/slides/slide12.xml><?xml version="1.0" encoding="utf-8"?>
 <p:sld xmlns:a="http://schemas.openxmlformats.org/drawingml/2006/main" xmlns:r="http://schemas.openxmlformats.org/officeDocument/2006/relationships" xmlns:p="http://schemas.openxmlformats.org/presentationml/2006/main">
   <p:cSld>
     <p:spTree>
@@ -8423,7 +9143,7 @@
 </p:sld>
 </file>
 
-<file path=ppt/slides/slide12.xml><?xml version="1.0" encoding="utf-8"?>
+<file path=ppt/slides/slide13.xml><?xml version="1.0" encoding="utf-8"?>
 <p:sld xmlns:a="http://schemas.openxmlformats.org/drawingml/2006/main" xmlns:r="http://schemas.openxmlformats.org/officeDocument/2006/relationships" xmlns:p="http://schemas.openxmlformats.org/presentationml/2006/main">
   <p:cSld>
     <p:spTree>
@@ -9125,601 +9845,6 @@
 </p:sld>
 </file>
 
-<file path=ppt/slides/slide13.xml><?xml version="1.0" encoding="utf-8"?>
-<p:sld xmlns:a="http://schemas.openxmlformats.org/drawingml/2006/main" xmlns:r="http://schemas.openxmlformats.org/officeDocument/2006/relationships" xmlns:p="http://schemas.openxmlformats.org/presentationml/2006/main">
-  <p:cSld>
-    <p:spTree>
-      <p:nvGrpSpPr>
-        <p:cNvPr id="1" name=""/>
-        <p:cNvGrpSpPr/>
-        <p:nvPr/>
-      </p:nvGrpSpPr>
-      <p:grpSpPr>
-        <a:xfrm>
-          <a:off x="0" y="0"/>
-          <a:ext cx="0" cy="0"/>
-          <a:chOff x="0" y="0"/>
-          <a:chExt cx="0" cy="0"/>
-        </a:xfrm>
-      </p:grpSpPr>
-      <p:sp>
-        <p:nvSpPr>
-          <p:cNvPr id="2" name="Freeform 15">
-            <a:extLst>
-              <a:ext uri="{FF2B5EF4-FFF2-40B4-BE49-F238E27FC236}">
-                <a16:creationId xmlns:a16="http://schemas.microsoft.com/office/drawing/2014/main" id="{7956E56C-C3F1-4DDA-8C0D-5A3212DAD5CF}"/>
-              </a:ext>
-            </a:extLst>
-          </p:cNvPr>
-          <p:cNvSpPr>
-            <a:spLocks/>
-          </p:cNvSpPr>
-          <p:nvPr/>
-        </p:nvSpPr>
-        <p:spPr bwMode="auto">
-          <a:xfrm>
-            <a:off x="389654" y="391902"/>
-            <a:ext cx="487234" cy="562546"/>
-          </a:xfrm>
-          <a:custGeom>
-            <a:avLst/>
-            <a:gdLst>
-              <a:gd name="T0" fmla="*/ 0 w 1171"/>
-              <a:gd name="T1" fmla="*/ 1014 h 1352"/>
-              <a:gd name="T2" fmla="*/ 0 w 1171"/>
-              <a:gd name="T3" fmla="*/ 338 h 1352"/>
-              <a:gd name="T4" fmla="*/ 586 w 1171"/>
-              <a:gd name="T5" fmla="*/ 0 h 1352"/>
-              <a:gd name="T6" fmla="*/ 1171 w 1171"/>
-              <a:gd name="T7" fmla="*/ 338 h 1352"/>
-              <a:gd name="T8" fmla="*/ 1171 w 1171"/>
-              <a:gd name="T9" fmla="*/ 1014 h 1352"/>
-              <a:gd name="T10" fmla="*/ 586 w 1171"/>
-              <a:gd name="T11" fmla="*/ 1352 h 1352"/>
-              <a:gd name="T12" fmla="*/ 0 w 1171"/>
-              <a:gd name="T13" fmla="*/ 1014 h 1352"/>
-            </a:gdLst>
-            <a:ahLst/>
-            <a:cxnLst>
-              <a:cxn ang="0">
-                <a:pos x="T0" y="T1"/>
-              </a:cxn>
-              <a:cxn ang="0">
-                <a:pos x="T2" y="T3"/>
-              </a:cxn>
-              <a:cxn ang="0">
-                <a:pos x="T4" y="T5"/>
-              </a:cxn>
-              <a:cxn ang="0">
-                <a:pos x="T6" y="T7"/>
-              </a:cxn>
-              <a:cxn ang="0">
-                <a:pos x="T8" y="T9"/>
-              </a:cxn>
-              <a:cxn ang="0">
-                <a:pos x="T10" y="T11"/>
-              </a:cxn>
-              <a:cxn ang="0">
-                <a:pos x="T12" y="T13"/>
-              </a:cxn>
-            </a:cxnLst>
-            <a:rect l="0" t="0" r="r" b="b"/>
-            <a:pathLst>
-              <a:path w="1171" h="1352">
-                <a:moveTo>
-                  <a:pt x="0" y="1014"/>
-                </a:moveTo>
-                <a:lnTo>
-                  <a:pt x="0" y="338"/>
-                </a:lnTo>
-                <a:lnTo>
-                  <a:pt x="586" y="0"/>
-                </a:lnTo>
-                <a:lnTo>
-                  <a:pt x="1171" y="338"/>
-                </a:lnTo>
-                <a:lnTo>
-                  <a:pt x="1171" y="1014"/>
-                </a:lnTo>
-                <a:lnTo>
-                  <a:pt x="586" y="1352"/>
-                </a:lnTo>
-                <a:lnTo>
-                  <a:pt x="0" y="1014"/>
-                </a:lnTo>
-                <a:close/>
-              </a:path>
-            </a:pathLst>
-          </a:custGeom>
-          <a:solidFill>
-            <a:srgbClr val="2B3E54"/>
-          </a:solidFill>
-          <a:ln>
-            <a:noFill/>
-          </a:ln>
-        </p:spPr>
-        <p:txBody>
-          <a:bodyPr vert="horz" wrap="square" lIns="91440" tIns="45720" rIns="91440" bIns="45720" numCol="1" anchor="t" anchorCtr="0" compatLnSpc="1">
-            <a:prstTxWarp prst="textNoShape">
-              <a:avLst/>
-            </a:prstTxWarp>
-          </a:bodyPr>
-          <a:lstStyle/>
-          <a:p>
-            <a:endParaRPr lang="zh-CN" altLang="en-US" sz="2133" dirty="0">
-              <a:cs typeface="+mn-ea"/>
-              <a:sym typeface="+mn-lt"/>
-            </a:endParaRPr>
-          </a:p>
-        </p:txBody>
-      </p:sp>
-      <p:sp>
-        <p:nvSpPr>
-          <p:cNvPr id="4" name="文本框 8">
-            <a:extLst>
-              <a:ext uri="{FF2B5EF4-FFF2-40B4-BE49-F238E27FC236}">
-                <a16:creationId xmlns:a16="http://schemas.microsoft.com/office/drawing/2014/main" id="{EFA8AEF7-CAE9-495F-AC4C-2B1E9B3AA0F7}"/>
-              </a:ext>
-            </a:extLst>
-          </p:cNvPr>
-          <p:cNvSpPr txBox="1"/>
-          <p:nvPr/>
-        </p:nvSpPr>
-        <p:spPr>
-          <a:xfrm>
-            <a:off x="979905" y="471160"/>
-            <a:ext cx="4043433" cy="461665"/>
-          </a:xfrm>
-          <a:prstGeom prst="rect">
-            <a:avLst/>
-          </a:prstGeom>
-          <a:noFill/>
-        </p:spPr>
-        <p:txBody>
-          <a:bodyPr wrap="square" lIns="91440" tIns="45720" rIns="91440" bIns="45720" rtlCol="0">
-            <a:spAutoFit/>
-          </a:bodyPr>
-          <a:lstStyle>
-            <a:defPPr>
-              <a:defRPr lang="zh-CN"/>
-            </a:defPPr>
-            <a:lvl1pPr marL="0" algn="l" defTabSz="914400" rtl="0" eaLnBrk="1" latinLnBrk="0" hangingPunct="1">
-              <a:defRPr sz="1800" kern="1200">
-                <a:solidFill>
-                  <a:schemeClr val="tx1"/>
-                </a:solidFill>
-                <a:latin typeface="+mn-lt"/>
-                <a:ea typeface="+mn-ea"/>
-                <a:cs typeface="+mn-cs"/>
-              </a:defRPr>
-            </a:lvl1pPr>
-            <a:lvl2pPr marL="457200" algn="l" defTabSz="914400" rtl="0" eaLnBrk="1" latinLnBrk="0" hangingPunct="1">
-              <a:defRPr sz="1800" kern="1200">
-                <a:solidFill>
-                  <a:schemeClr val="tx1"/>
-                </a:solidFill>
-                <a:latin typeface="+mn-lt"/>
-                <a:ea typeface="+mn-ea"/>
-                <a:cs typeface="+mn-cs"/>
-              </a:defRPr>
-            </a:lvl2pPr>
-            <a:lvl3pPr marL="914400" algn="l" defTabSz="914400" rtl="0" eaLnBrk="1" latinLnBrk="0" hangingPunct="1">
-              <a:defRPr sz="1800" kern="1200">
-                <a:solidFill>
-                  <a:schemeClr val="tx1"/>
-                </a:solidFill>
-                <a:latin typeface="+mn-lt"/>
-                <a:ea typeface="+mn-ea"/>
-                <a:cs typeface="+mn-cs"/>
-              </a:defRPr>
-            </a:lvl3pPr>
-            <a:lvl4pPr marL="1371600" algn="l" defTabSz="914400" rtl="0" eaLnBrk="1" latinLnBrk="0" hangingPunct="1">
-              <a:defRPr sz="1800" kern="1200">
-                <a:solidFill>
-                  <a:schemeClr val="tx1"/>
-                </a:solidFill>
-                <a:latin typeface="+mn-lt"/>
-                <a:ea typeface="+mn-ea"/>
-                <a:cs typeface="+mn-cs"/>
-              </a:defRPr>
-            </a:lvl4pPr>
-            <a:lvl5pPr marL="1828800" algn="l" defTabSz="914400" rtl="0" eaLnBrk="1" latinLnBrk="0" hangingPunct="1">
-              <a:defRPr sz="1800" kern="1200">
-                <a:solidFill>
-                  <a:schemeClr val="tx1"/>
-                </a:solidFill>
-                <a:latin typeface="+mn-lt"/>
-                <a:ea typeface="+mn-ea"/>
-                <a:cs typeface="+mn-cs"/>
-              </a:defRPr>
-            </a:lvl5pPr>
-            <a:lvl6pPr marL="2286000" algn="l" defTabSz="914400" rtl="0" eaLnBrk="1" latinLnBrk="0" hangingPunct="1">
-              <a:defRPr sz="1800" kern="1200">
-                <a:solidFill>
-                  <a:schemeClr val="tx1"/>
-                </a:solidFill>
-                <a:latin typeface="+mn-lt"/>
-                <a:ea typeface="+mn-ea"/>
-                <a:cs typeface="+mn-cs"/>
-              </a:defRPr>
-            </a:lvl6pPr>
-            <a:lvl7pPr marL="2743200" algn="l" defTabSz="914400" rtl="0" eaLnBrk="1" latinLnBrk="0" hangingPunct="1">
-              <a:defRPr sz="1800" kern="1200">
-                <a:solidFill>
-                  <a:schemeClr val="tx1"/>
-                </a:solidFill>
-                <a:latin typeface="+mn-lt"/>
-                <a:ea typeface="+mn-ea"/>
-                <a:cs typeface="+mn-cs"/>
-              </a:defRPr>
-            </a:lvl7pPr>
-            <a:lvl8pPr marL="3200400" algn="l" defTabSz="914400" rtl="0" eaLnBrk="1" latinLnBrk="0" hangingPunct="1">
-              <a:defRPr sz="1800" kern="1200">
-                <a:solidFill>
-                  <a:schemeClr val="tx1"/>
-                </a:solidFill>
-                <a:latin typeface="+mn-lt"/>
-                <a:ea typeface="+mn-ea"/>
-                <a:cs typeface="+mn-cs"/>
-              </a:defRPr>
-            </a:lvl8pPr>
-            <a:lvl9pPr marL="3657600" algn="l" defTabSz="914400" rtl="0" eaLnBrk="1" latinLnBrk="0" hangingPunct="1">
-              <a:defRPr sz="1800" kern="1200">
-                <a:solidFill>
-                  <a:schemeClr val="tx1"/>
-                </a:solidFill>
-                <a:latin typeface="+mn-lt"/>
-                <a:ea typeface="+mn-ea"/>
-                <a:cs typeface="+mn-cs"/>
-              </a:defRPr>
-            </a:lvl9pPr>
-          </a:lstStyle>
-          <a:p>
-            <a:r>
-              <a:rPr lang="en-US" altLang="zh-CN" sz="2400" dirty="0">
-                <a:solidFill>
-                  <a:srgbClr val="2B3E54"/>
-                </a:solidFill>
-                <a:cs typeface="+mn-ea"/>
-                <a:sym typeface="+mn-lt"/>
-              </a:rPr>
-              <a:t>UIUC VPN</a:t>
-            </a:r>
-          </a:p>
-        </p:txBody>
-      </p:sp>
-      <p:sp>
-        <p:nvSpPr>
-          <p:cNvPr id="5" name="文本框 4">
-            <a:extLst>
-              <a:ext uri="{FF2B5EF4-FFF2-40B4-BE49-F238E27FC236}">
-                <a16:creationId xmlns:a16="http://schemas.microsoft.com/office/drawing/2014/main" id="{392BF1B9-F846-ADE3-8856-88A452152C51}"/>
-              </a:ext>
-            </a:extLst>
-          </p:cNvPr>
-          <p:cNvSpPr txBox="1"/>
-          <p:nvPr/>
-        </p:nvSpPr>
-        <p:spPr>
-          <a:xfrm>
-            <a:off x="1623646" y="1620688"/>
-            <a:ext cx="6096000" cy="369332"/>
-          </a:xfrm>
-          <a:prstGeom prst="rect">
-            <a:avLst/>
-          </a:prstGeom>
-          <a:noFill/>
-        </p:spPr>
-        <p:txBody>
-          <a:bodyPr wrap="square">
-            <a:spAutoFit/>
-          </a:bodyPr>
-          <a:lstStyle/>
-          <a:p>
-            <a:r>
-              <a:rPr lang="en-US" altLang="zh-CN" b="0" i="0" u="none" strike="noStrike" dirty="0">
-                <a:solidFill>
-                  <a:srgbClr val="2376B7"/>
-                </a:solidFill>
-                <a:effectLst/>
-                <a:highlight>
-                  <a:srgbClr val="FFFFFF"/>
-                </a:highlight>
-                <a:latin typeface="system-ui"/>
-                <a:hlinkClick r:id="rId2"/>
-              </a:rPr>
-              <a:t>https://answers.uillinois.edu/illinois/98773</a:t>
-            </a:r>
-            <a:endParaRPr lang="zh-CN" altLang="en-US" dirty="0"/>
-          </a:p>
-        </p:txBody>
-      </p:sp>
-      <p:sp>
-        <p:nvSpPr>
-          <p:cNvPr id="6" name="文本框 5">
-            <a:extLst>
-              <a:ext uri="{FF2B5EF4-FFF2-40B4-BE49-F238E27FC236}">
-                <a16:creationId xmlns:a16="http://schemas.microsoft.com/office/drawing/2014/main" id="{5360B9E5-10A4-12CF-3E7E-3CE2C1848BAC}"/>
-              </a:ext>
-            </a:extLst>
-          </p:cNvPr>
-          <p:cNvSpPr txBox="1"/>
-          <p:nvPr/>
-        </p:nvSpPr>
-        <p:spPr>
-          <a:xfrm>
-            <a:off x="1623646" y="1133346"/>
-            <a:ext cx="7971692" cy="369332"/>
-          </a:xfrm>
-          <a:prstGeom prst="rect">
-            <a:avLst/>
-          </a:prstGeom>
-          <a:noFill/>
-        </p:spPr>
-        <p:txBody>
-          <a:bodyPr wrap="square">
-            <a:spAutoFit/>
-          </a:bodyPr>
-          <a:lstStyle/>
-          <a:p>
-            <a:r>
-              <a:rPr lang="zh-CN" altLang="en-US" dirty="0"/>
-              <a:t>根据链接和网站步骤进行安装。</a:t>
-            </a:r>
-          </a:p>
-        </p:txBody>
-      </p:sp>
-      <p:pic>
-        <p:nvPicPr>
-          <p:cNvPr id="8" name="图片 7">
-            <a:extLst>
-              <a:ext uri="{FF2B5EF4-FFF2-40B4-BE49-F238E27FC236}">
-                <a16:creationId xmlns:a16="http://schemas.microsoft.com/office/drawing/2014/main" id="{74DAF536-4F4D-C9BE-0B53-6740B210B1F8}"/>
-              </a:ext>
-            </a:extLst>
-          </p:cNvPr>
-          <p:cNvPicPr>
-            <a:picLocks noChangeAspect="1"/>
-          </p:cNvPicPr>
-          <p:nvPr/>
-        </p:nvPicPr>
-        <p:blipFill>
-          <a:blip r:embed="rId3"/>
-          <a:stretch>
-            <a:fillRect/>
-          </a:stretch>
-        </p:blipFill>
-        <p:spPr>
-          <a:xfrm>
-            <a:off x="1711568" y="2331361"/>
-            <a:ext cx="3855839" cy="1884386"/>
-          </a:xfrm>
-          <a:prstGeom prst="rect">
-            <a:avLst/>
-          </a:prstGeom>
-        </p:spPr>
-      </p:pic>
-      <p:sp>
-        <p:nvSpPr>
-          <p:cNvPr id="9" name="文本框 8">
-            <a:extLst>
-              <a:ext uri="{FF2B5EF4-FFF2-40B4-BE49-F238E27FC236}">
-                <a16:creationId xmlns:a16="http://schemas.microsoft.com/office/drawing/2014/main" id="{BEED93CE-DE69-51CB-1C8B-106A24C7AE92}"/>
-              </a:ext>
-            </a:extLst>
-          </p:cNvPr>
-          <p:cNvSpPr txBox="1"/>
-          <p:nvPr/>
-        </p:nvSpPr>
-        <p:spPr>
-          <a:xfrm>
-            <a:off x="1623646" y="4498649"/>
-            <a:ext cx="7971692" cy="369332"/>
-          </a:xfrm>
-          <a:prstGeom prst="rect">
-            <a:avLst/>
-          </a:prstGeom>
-          <a:noFill/>
-        </p:spPr>
-        <p:txBody>
-          <a:bodyPr wrap="square">
-            <a:spAutoFit/>
-          </a:bodyPr>
-          <a:lstStyle/>
-          <a:p>
-            <a:r>
-              <a:rPr lang="zh-CN" altLang="en-US" dirty="0"/>
-              <a:t>连接之后选择通道三，否则无法连上外网。</a:t>
-            </a:r>
-          </a:p>
-        </p:txBody>
-      </p:sp>
-    </p:spTree>
-    <p:extLst>
-      <p:ext uri="{BB962C8B-B14F-4D97-AF65-F5344CB8AC3E}">
-        <p14:creationId xmlns:p14="http://schemas.microsoft.com/office/powerpoint/2010/main" val="984183923"/>
-      </p:ext>
-    </p:extLst>
-  </p:cSld>
-  <p:clrMapOvr>
-    <a:masterClrMapping/>
-  </p:clrMapOvr>
-  <p:timing>
-    <p:tnLst>
-      <p:par>
-        <p:cTn id="1" dur="indefinite" restart="never" nodeType="tmRoot">
-          <p:childTnLst>
-            <p:seq concurrent="1" nextAc="seek">
-              <p:cTn id="2" dur="indefinite" nodeType="mainSeq">
-                <p:childTnLst>
-                  <p:par>
-                    <p:cTn id="3" fill="hold">
-                      <p:stCondLst>
-                        <p:cond delay="indefinite"/>
-                        <p:cond evt="onBegin" delay="0">
-                          <p:tn val="2"/>
-                        </p:cond>
-                      </p:stCondLst>
-                      <p:childTnLst>
-                        <p:par>
-                          <p:cTn id="4" fill="hold">
-                            <p:stCondLst>
-                              <p:cond delay="0"/>
-                            </p:stCondLst>
-                            <p:childTnLst>
-                              <p:par>
-                                <p:cTn id="5" presetID="15" presetClass="entr" presetSubtype="0" fill="hold" grpId="0" nodeType="afterEffect">
-                                  <p:stCondLst>
-                                    <p:cond delay="0"/>
-                                  </p:stCondLst>
-                                  <p:childTnLst>
-                                    <p:set>
-                                      <p:cBhvr>
-                                        <p:cTn id="6" dur="1" fill="hold">
-                                          <p:stCondLst>
-                                            <p:cond delay="0"/>
-                                          </p:stCondLst>
-                                        </p:cTn>
-                                        <p:tgtEl>
-                                          <p:spTgt spid="4"/>
-                                        </p:tgtEl>
-                                        <p:attrNameLst>
-                                          <p:attrName>style.visibility</p:attrName>
-                                        </p:attrNameLst>
-                                      </p:cBhvr>
-                                      <p:to>
-                                        <p:strVal val="visible"/>
-                                      </p:to>
-                                    </p:set>
-                                    <p:anim calcmode="lin" valueType="num">
-                                      <p:cBhvr>
-                                        <p:cTn id="7" dur="1000" fill="hold"/>
-                                        <p:tgtEl>
-                                          <p:spTgt spid="4"/>
-                                        </p:tgtEl>
-                                        <p:attrNameLst>
-                                          <p:attrName>ppt_w</p:attrName>
-                                        </p:attrNameLst>
-                                      </p:cBhvr>
-                                      <p:tavLst>
-                                        <p:tav tm="0">
-                                          <p:val>
-                                            <p:fltVal val="0"/>
-                                          </p:val>
-                                        </p:tav>
-                                        <p:tav tm="100000">
-                                          <p:val>
-                                            <p:strVal val="#ppt_w"/>
-                                          </p:val>
-                                        </p:tav>
-                                      </p:tavLst>
-                                    </p:anim>
-                                    <p:anim calcmode="lin" valueType="num">
-                                      <p:cBhvr>
-                                        <p:cTn id="8" dur="1000" fill="hold"/>
-                                        <p:tgtEl>
-                                          <p:spTgt spid="4"/>
-                                        </p:tgtEl>
-                                        <p:attrNameLst>
-                                          <p:attrName>ppt_h</p:attrName>
-                                        </p:attrNameLst>
-                                      </p:cBhvr>
-                                      <p:tavLst>
-                                        <p:tav tm="0">
-                                          <p:val>
-                                            <p:fltVal val="0"/>
-                                          </p:val>
-                                        </p:tav>
-                                        <p:tav tm="100000">
-                                          <p:val>
-                                            <p:strVal val="#ppt_h"/>
-                                          </p:val>
-                                        </p:tav>
-                                      </p:tavLst>
-                                    </p:anim>
-                                    <p:anim calcmode="lin" valueType="num">
-                                      <p:cBhvr>
-                                        <p:cTn id="9" dur="1000" fill="hold"/>
-                                        <p:tgtEl>
-                                          <p:spTgt spid="4"/>
-                                        </p:tgtEl>
-                                        <p:attrNameLst>
-                                          <p:attrName>ppt_x</p:attrName>
-                                        </p:attrNameLst>
-                                      </p:cBhvr>
-                                      <p:tavLst>
-                                        <p:tav tm="0" fmla="#ppt_x+(cos(-2*pi*(1-$))*-#ppt_x-sin(-2*pi*(1-$))*(1-#ppt_y))*(1-$)">
-                                          <p:val>
-                                            <p:fltVal val="0"/>
-                                          </p:val>
-                                        </p:tav>
-                                        <p:tav tm="100000">
-                                          <p:val>
-                                            <p:fltVal val="1"/>
-                                          </p:val>
-                                        </p:tav>
-                                      </p:tavLst>
-                                    </p:anim>
-                                    <p:anim calcmode="lin" valueType="num">
-                                      <p:cBhvr>
-                                        <p:cTn id="10" dur="1000" fill="hold"/>
-                                        <p:tgtEl>
-                                          <p:spTgt spid="4"/>
-                                        </p:tgtEl>
-                                        <p:attrNameLst>
-                                          <p:attrName>ppt_y</p:attrName>
-                                        </p:attrNameLst>
-                                      </p:cBhvr>
-                                      <p:tavLst>
-                                        <p:tav tm="0" fmla="#ppt_y+(sin(-2*pi*(1-$))*-#ppt_x+cos(-2*pi*(1-$))*(1-#ppt_y))*(1-$)">
-                                          <p:val>
-                                            <p:fltVal val="0"/>
-                                          </p:val>
-                                        </p:tav>
-                                        <p:tav tm="100000">
-                                          <p:val>
-                                            <p:fltVal val="1"/>
-                                          </p:val>
-                                        </p:tav>
-                                      </p:tavLst>
-                                    </p:anim>
-                                  </p:childTnLst>
-                                </p:cTn>
-                              </p:par>
-                            </p:childTnLst>
-                          </p:cTn>
-                        </p:par>
-                      </p:childTnLst>
-                    </p:cTn>
-                  </p:par>
-                </p:childTnLst>
-              </p:cTn>
-              <p:prevCondLst>
-                <p:cond evt="onPrev" delay="0">
-                  <p:tgtEl>
-                    <p:sldTgt/>
-                  </p:tgtEl>
-                </p:cond>
-              </p:prevCondLst>
-              <p:nextCondLst>
-                <p:cond evt="onNext" delay="0">
-                  <p:tgtEl>
-                    <p:sldTgt/>
-                  </p:tgtEl>
-                </p:cond>
-              </p:nextCondLst>
-            </p:seq>
-          </p:childTnLst>
-        </p:cTn>
-      </p:par>
-    </p:tnLst>
-    <p:bldLst>
-      <p:bldP spid="4" grpId="0"/>
-    </p:bldLst>
-  </p:timing>
-</p:sld>
-</file>
-
 <file path=ppt/slides/slide14.xml><?xml version="1.0" encoding="utf-8"?>
 <p:sld xmlns:a="http://schemas.openxmlformats.org/drawingml/2006/main" xmlns:r="http://schemas.openxmlformats.org/officeDocument/2006/relationships" xmlns:p="http://schemas.openxmlformats.org/presentationml/2006/main">
   <p:cSld>
@@ -9863,7 +9988,7 @@
         <p:spPr>
           <a:xfrm>
             <a:off x="979905" y="471160"/>
-            <a:ext cx="1183003" cy="461665"/>
+            <a:ext cx="4043433" cy="461665"/>
           </a:xfrm>
           <a:prstGeom prst="rect">
             <a:avLst/>
@@ -9971,31 +10096,24 @@
           </a:lstStyle>
           <a:p>
             <a:r>
-              <a:rPr lang="en-US" altLang="zh-CN" sz="2400" dirty="0" err="1">
+              <a:rPr lang="en-US" altLang="zh-CN" sz="2400" dirty="0">
                 <a:solidFill>
                   <a:srgbClr val="2B3E54"/>
                 </a:solidFill>
                 <a:cs typeface="+mn-ea"/>
                 <a:sym typeface="+mn-lt"/>
               </a:rPr>
-              <a:t>Github</a:t>
-            </a:r>
-            <a:endParaRPr lang="en-US" altLang="zh-CN" sz="2400" dirty="0">
-              <a:solidFill>
-                <a:srgbClr val="2B3E54"/>
-              </a:solidFill>
-              <a:cs typeface="+mn-ea"/>
-              <a:sym typeface="+mn-lt"/>
-            </a:endParaRPr>
+              <a:t>UIUC VPN</a:t>
+            </a:r>
           </a:p>
         </p:txBody>
       </p:sp>
       <p:sp>
         <p:nvSpPr>
-          <p:cNvPr id="8" name="文本框 7">
+          <p:cNvPr id="5" name="文本框 4">
             <a:extLst>
               <a:ext uri="{FF2B5EF4-FFF2-40B4-BE49-F238E27FC236}">
-                <a16:creationId xmlns:a16="http://schemas.microsoft.com/office/drawing/2014/main" id="{F2DAC365-B829-318B-17CF-A02819C2E7FD}"/>
+                <a16:creationId xmlns:a16="http://schemas.microsoft.com/office/drawing/2014/main" id="{392BF1B9-F846-ADE3-8856-88A452152C51}"/>
               </a:ext>
             </a:extLst>
           </p:cNvPr>
@@ -10004,8 +10122,8 @@
         </p:nvSpPr>
         <p:spPr>
           <a:xfrm>
-            <a:off x="1623646" y="1133346"/>
-            <a:ext cx="7971692" cy="1200329"/>
+            <a:off x="1623646" y="1620688"/>
+            <a:ext cx="6096000" cy="369332"/>
           </a:xfrm>
           <a:prstGeom prst="rect">
             <a:avLst/>
@@ -10019,97 +10137,29 @@
           <a:lstStyle/>
           <a:p>
             <a:r>
-              <a:rPr lang="en-US" altLang="zh-CN" dirty="0"/>
-              <a:t>GitHub</a:t>
-            </a:r>
-            <a:r>
-              <a:rPr lang="zh-CN" altLang="en-US" dirty="0"/>
-              <a:t>是一个在线软件源代码托管服务平台，使用</a:t>
-            </a:r>
-            <a:r>
-              <a:rPr lang="en-US" altLang="zh-CN" dirty="0"/>
-              <a:t>Git</a:t>
-            </a:r>
-            <a:r>
-              <a:rPr lang="zh-CN" altLang="en-US" dirty="0"/>
-              <a:t>作为版本控制软件，由开发者克里斯</a:t>
-            </a:r>
-            <a:r>
-              <a:rPr lang="en-US" altLang="zh-CN" dirty="0"/>
-              <a:t>·</a:t>
-            </a:r>
-            <a:r>
-              <a:rPr lang="zh-CN" altLang="en-US" dirty="0"/>
-              <a:t>汪斯崔斯、</a:t>
-            </a:r>
-            <a:r>
-              <a:rPr lang="en-US" altLang="zh-CN" dirty="0"/>
-              <a:t>P·J·</a:t>
-            </a:r>
-            <a:r>
-              <a:rPr lang="zh-CN" altLang="en-US" dirty="0"/>
-              <a:t>海特和汤姆</a:t>
-            </a:r>
-            <a:r>
-              <a:rPr lang="en-US" altLang="zh-CN" dirty="0"/>
-              <a:t>·</a:t>
-            </a:r>
-            <a:r>
-              <a:rPr lang="zh-CN" altLang="en-US" dirty="0"/>
-              <a:t>普雷斯顿</a:t>
-            </a:r>
-            <a:r>
-              <a:rPr lang="en-US" altLang="zh-CN" dirty="0"/>
-              <a:t>·</a:t>
-            </a:r>
-            <a:r>
-              <a:rPr lang="zh-CN" altLang="en-US" dirty="0"/>
-              <a:t>沃纳使用</a:t>
-            </a:r>
-            <a:r>
-              <a:rPr lang="en-US" altLang="zh-CN" dirty="0"/>
-              <a:t>Ruby on Rails</a:t>
-            </a:r>
-            <a:r>
-              <a:rPr lang="zh-CN" altLang="en-US" dirty="0"/>
-              <a:t>编写而成。在</a:t>
-            </a:r>
-            <a:r>
-              <a:rPr lang="en-US" altLang="zh-CN" dirty="0"/>
-              <a:t>2018</a:t>
-            </a:r>
-            <a:r>
-              <a:rPr lang="zh-CN" altLang="en-US" dirty="0"/>
-              <a:t>年，</a:t>
-            </a:r>
-            <a:r>
-              <a:rPr lang="en-US" altLang="zh-CN" dirty="0"/>
-              <a:t>GitHub</a:t>
-            </a:r>
-            <a:r>
-              <a:rPr lang="zh-CN" altLang="en-US" dirty="0"/>
-              <a:t>被微软公司收购。</a:t>
-            </a:r>
-            <a:endParaRPr lang="en-US" altLang="zh-CN" dirty="0"/>
-          </a:p>
-          <a:p>
-            <a:r>
-              <a:rPr lang="en-US" altLang="zh-CN" dirty="0"/>
-              <a:t>Git</a:t>
-            </a:r>
-            <a:r>
-              <a:rPr lang="zh-CN" altLang="en-US" dirty="0"/>
-              <a:t>的使用之后将在之后介绍。</a:t>
-            </a:r>
+              <a:rPr lang="en-US" altLang="zh-CN" b="0" i="0" u="none" strike="noStrike" dirty="0">
+                <a:solidFill>
+                  <a:srgbClr val="2376B7"/>
+                </a:solidFill>
+                <a:effectLst/>
+                <a:highlight>
+                  <a:srgbClr val="FFFFFF"/>
+                </a:highlight>
+                <a:latin typeface="system-ui"/>
+                <a:hlinkClick r:id="rId2"/>
+              </a:rPr>
+              <a:t>https://answers.uillinois.edu/illinois/98773</a:t>
+            </a:r>
+            <a:endParaRPr lang="zh-CN" altLang="en-US" dirty="0"/>
           </a:p>
         </p:txBody>
       </p:sp>
       <p:sp>
         <p:nvSpPr>
-          <p:cNvPr id="12" name="文本框 11">
+          <p:cNvPr id="6" name="文本框 5">
             <a:extLst>
               <a:ext uri="{FF2B5EF4-FFF2-40B4-BE49-F238E27FC236}">
-                <a16:creationId xmlns:a16="http://schemas.microsoft.com/office/drawing/2014/main" id="{F4B9CE43-34BA-5B86-040A-3520C9F04294}"/>
+                <a16:creationId xmlns:a16="http://schemas.microsoft.com/office/drawing/2014/main" id="{5360B9E5-10A4-12CF-3E7E-3CE2C1848BAC}"/>
               </a:ext>
             </a:extLst>
           </p:cNvPr>
@@ -10118,8 +10168,8 @@
         </p:nvSpPr>
         <p:spPr>
           <a:xfrm>
-            <a:off x="1623646" y="2493001"/>
-            <a:ext cx="7971692" cy="2031325"/>
+            <a:off x="1623646" y="1133346"/>
+            <a:ext cx="7971692" cy="369332"/>
           </a:xfrm>
           <a:prstGeom prst="rect">
             <a:avLst/>
@@ -10133,96 +10183,18 @@
           <a:lstStyle/>
           <a:p>
             <a:r>
-              <a:rPr lang="zh-CN" altLang="en-US" b="1" dirty="0"/>
-              <a:t>安装</a:t>
-            </a:r>
-            <a:endParaRPr lang="en-US" altLang="zh-CN" b="1" dirty="0"/>
-          </a:p>
-          <a:p>
-            <a:r>
               <a:rPr lang="zh-CN" altLang="en-US" dirty="0"/>
-              <a:t>可以下载</a:t>
-            </a:r>
-            <a:r>
-              <a:rPr lang="en-US" altLang="zh-CN" dirty="0" err="1"/>
-              <a:t>github</a:t>
-            </a:r>
-            <a:r>
-              <a:rPr lang="zh-CN" altLang="en-US" dirty="0"/>
-              <a:t>桌面应用或直接下载</a:t>
-            </a:r>
-            <a:r>
-              <a:rPr lang="en-US" altLang="zh-CN" dirty="0"/>
-              <a:t>git</a:t>
-            </a:r>
-            <a:r>
-              <a:rPr lang="zh-CN" altLang="en-US" dirty="0"/>
-              <a:t>工具。</a:t>
-            </a:r>
-            <a:endParaRPr lang="en-US" altLang="zh-CN" dirty="0"/>
-          </a:p>
-          <a:p>
-            <a:endParaRPr lang="en-US" altLang="zh-CN" dirty="0"/>
-          </a:p>
-          <a:p>
-            <a:r>
-              <a:rPr lang="en-US" altLang="zh-CN" dirty="0"/>
-              <a:t>Linux</a:t>
-            </a:r>
-            <a:r>
-              <a:rPr lang="zh-CN" altLang="en-US" dirty="0"/>
-              <a:t>： </a:t>
-            </a:r>
-            <a:r>
-              <a:rPr lang="en-US" altLang="zh-CN" dirty="0" err="1"/>
-              <a:t>sudo</a:t>
-            </a:r>
-            <a:r>
-              <a:rPr lang="en-US" altLang="zh-CN" dirty="0"/>
-              <a:t> apt install git</a:t>
-            </a:r>
-          </a:p>
-          <a:p>
-            <a:r>
-              <a:rPr lang="en-US" altLang="zh-CN" dirty="0"/>
-              <a:t>MacOS: brew install git</a:t>
-            </a:r>
-          </a:p>
-          <a:p>
-            <a:r>
-              <a:rPr lang="en-US" altLang="zh-CN" dirty="0"/>
-              <a:t>Windows:  </a:t>
-            </a:r>
-            <a:r>
-              <a:rPr lang="zh-CN" altLang="en-US" dirty="0"/>
-              <a:t>去官网下载</a:t>
-            </a:r>
-            <a:r>
-              <a:rPr lang="en-US" altLang="zh-CN" dirty="0">
-                <a:hlinkClick r:id="rId2"/>
-              </a:rPr>
-              <a:t>https://git-scm.com/downloads</a:t>
-            </a:r>
-            <a:endParaRPr lang="en-US" altLang="zh-CN" dirty="0"/>
-          </a:p>
-          <a:p>
-            <a:r>
-              <a:rPr lang="en-US" altLang="zh-CN" dirty="0"/>
-              <a:t>	</a:t>
-            </a:r>
-            <a:r>
-              <a:rPr lang="zh-CN" altLang="en-US" dirty="0"/>
-              <a:t>不确定是否会自动添加到环境变量，如果没添加那就手动添加一下</a:t>
+              <a:t>根据链接和网站步骤进行安装。</a:t>
             </a:r>
           </a:p>
         </p:txBody>
       </p:sp>
       <p:pic>
         <p:nvPicPr>
-          <p:cNvPr id="14" name="图片 13">
+          <p:cNvPr id="8" name="图片 7">
             <a:extLst>
               <a:ext uri="{FF2B5EF4-FFF2-40B4-BE49-F238E27FC236}">
-                <a16:creationId xmlns:a16="http://schemas.microsoft.com/office/drawing/2014/main" id="{39BB9AC8-9604-F0C8-B680-545AD6B0BF3B}"/>
+                <a16:creationId xmlns:a16="http://schemas.microsoft.com/office/drawing/2014/main" id="{74DAF536-4F4D-C9BE-0B53-6740B210B1F8}"/>
               </a:ext>
             </a:extLst>
           </p:cNvPr>
@@ -10239,8 +10211,8 @@
         </p:blipFill>
         <p:spPr>
           <a:xfrm>
-            <a:off x="1688123" y="4683652"/>
-            <a:ext cx="6473340" cy="1308690"/>
+            <a:off x="1711568" y="2331361"/>
+            <a:ext cx="3855839" cy="1884386"/>
           </a:xfrm>
           <a:prstGeom prst="rect">
             <a:avLst/>
@@ -10249,10 +10221,10 @@
       </p:pic>
       <p:sp>
         <p:nvSpPr>
-          <p:cNvPr id="15" name="文本框 14">
+          <p:cNvPr id="9" name="文本框 8">
             <a:extLst>
               <a:ext uri="{FF2B5EF4-FFF2-40B4-BE49-F238E27FC236}">
-                <a16:creationId xmlns:a16="http://schemas.microsoft.com/office/drawing/2014/main" id="{76665CE0-AE53-F44B-6B7B-AD9183188C1D}"/>
+                <a16:creationId xmlns:a16="http://schemas.microsoft.com/office/drawing/2014/main" id="{BEED93CE-DE69-51CB-1C8B-106A24C7AE92}"/>
               </a:ext>
             </a:extLst>
           </p:cNvPr>
@@ -10261,8 +10233,8 @@
         </p:nvSpPr>
         <p:spPr>
           <a:xfrm>
-            <a:off x="8258907" y="5153331"/>
-            <a:ext cx="877163" cy="369332"/>
+            <a:off x="1623646" y="4498649"/>
+            <a:ext cx="7971692" cy="369332"/>
           </a:xfrm>
           <a:prstGeom prst="rect">
             <a:avLst/>
@@ -10270,20 +10242,14 @@
           <a:noFill/>
         </p:spPr>
         <p:txBody>
-          <a:bodyPr wrap="none" rtlCol="0">
+          <a:bodyPr wrap="square">
             <a:spAutoFit/>
           </a:bodyPr>
           <a:lstStyle/>
           <a:p>
             <a:r>
-              <a:rPr lang="en-US" altLang="zh-CN" dirty="0">
-                <a:sym typeface="Wingdings" panose="05000000000000000000" pitchFamily="2" charset="2"/>
-              </a:rPr>
-              <a:t></a:t>
-            </a:r>
-            <a:r>
               <a:rPr lang="zh-CN" altLang="en-US" dirty="0"/>
-              <a:t>成功</a:t>
+              <a:t>连接之后选择通道三，否则无法连上外网。</a:t>
             </a:r>
           </a:p>
         </p:txBody>
@@ -10291,7 +10257,7 @@
     </p:spTree>
     <p:extLst>
       <p:ext uri="{BB962C8B-B14F-4D97-AF65-F5344CB8AC3E}">
-        <p14:creationId xmlns:p14="http://schemas.microsoft.com/office/powerpoint/2010/main" val="2356378921"/>
+        <p14:creationId xmlns:p14="http://schemas.microsoft.com/office/powerpoint/2010/main" val="984183923"/>
       </p:ext>
     </p:extLst>
   </p:cSld>
@@ -10617,7 +10583,7 @@
         <p:spPr>
           <a:xfrm>
             <a:off x="979905" y="471160"/>
-            <a:ext cx="4043433" cy="461665"/>
+            <a:ext cx="1183003" cy="461665"/>
           </a:xfrm>
           <a:prstGeom prst="rect">
             <a:avLst/>
@@ -10725,14 +10691,14 @@
           </a:lstStyle>
           <a:p>
             <a:r>
-              <a:rPr lang="zh-CN" altLang="en-US" sz="2400" dirty="0">
+              <a:rPr lang="en-US" altLang="zh-CN" sz="2400" dirty="0" err="1">
                 <a:solidFill>
                   <a:srgbClr val="2B3E54"/>
                 </a:solidFill>
                 <a:cs typeface="+mn-ea"/>
                 <a:sym typeface="+mn-lt"/>
               </a:rPr>
-              <a:t>我们的电控代码仓库</a:t>
+              <a:t>Github</a:t>
             </a:r>
             <a:endParaRPr lang="en-US" altLang="zh-CN" sz="2400" dirty="0">
               <a:solidFill>
@@ -10744,42 +10710,12 @@
           </a:p>
         </p:txBody>
       </p:sp>
-      <p:pic>
-        <p:nvPicPr>
-          <p:cNvPr id="5" name="图片 4">
+      <p:sp>
+        <p:nvSpPr>
+          <p:cNvPr id="8" name="文本框 7">
             <a:extLst>
               <a:ext uri="{FF2B5EF4-FFF2-40B4-BE49-F238E27FC236}">
-                <a16:creationId xmlns:a16="http://schemas.microsoft.com/office/drawing/2014/main" id="{4CCF9C39-B76C-84C6-A40D-0090EFC93B65}"/>
-              </a:ext>
-            </a:extLst>
-          </p:cNvPr>
-          <p:cNvPicPr>
-            <a:picLocks noChangeAspect="1"/>
-          </p:cNvPicPr>
-          <p:nvPr/>
-        </p:nvPicPr>
-        <p:blipFill>
-          <a:blip r:embed="rId2"/>
-          <a:stretch>
-            <a:fillRect/>
-          </a:stretch>
-        </p:blipFill>
-        <p:spPr>
-          <a:xfrm>
-            <a:off x="1090245" y="1672691"/>
-            <a:ext cx="7057293" cy="3923223"/>
-          </a:xfrm>
-          <a:prstGeom prst="rect">
-            <a:avLst/>
-          </a:prstGeom>
-        </p:spPr>
-      </p:pic>
-      <p:sp>
-        <p:nvSpPr>
-          <p:cNvPr id="7" name="文本框 6">
-            <a:extLst>
-              <a:ext uri="{FF2B5EF4-FFF2-40B4-BE49-F238E27FC236}">
-                <a16:creationId xmlns:a16="http://schemas.microsoft.com/office/drawing/2014/main" id="{D8E1BBC3-EAF2-36BC-96AE-8CED7C3FCC04}"/>
+                <a16:creationId xmlns:a16="http://schemas.microsoft.com/office/drawing/2014/main" id="{F2DAC365-B829-318B-17CF-A02819C2E7FD}"/>
               </a:ext>
             </a:extLst>
           </p:cNvPr>
@@ -10788,8 +10724,8 @@
         </p:nvSpPr>
         <p:spPr>
           <a:xfrm>
-            <a:off x="1090245" y="1118092"/>
-            <a:ext cx="6096000" cy="369332"/>
+            <a:off x="1623646" y="1133346"/>
+            <a:ext cx="7971692" cy="1200329"/>
           </a:xfrm>
           <a:prstGeom prst="rect">
             <a:avLst/>
@@ -10803,8 +10739,271 @@
           <a:lstStyle/>
           <a:p>
             <a:r>
+              <a:rPr lang="en-US" altLang="zh-CN" dirty="0"/>
+              <a:t>GitHub</a:t>
+            </a:r>
+            <a:r>
               <a:rPr lang="zh-CN" altLang="en-US" dirty="0"/>
-              <a:t>https://github.com/Meta-Team/Meta-Embedded</a:t>
+              <a:t>是一个在线软件源代码托管服务平台，使用</a:t>
+            </a:r>
+            <a:r>
+              <a:rPr lang="en-US" altLang="zh-CN" dirty="0"/>
+              <a:t>Git</a:t>
+            </a:r>
+            <a:r>
+              <a:rPr lang="zh-CN" altLang="en-US" dirty="0"/>
+              <a:t>作为版本控制软件，由开发者克里斯</a:t>
+            </a:r>
+            <a:r>
+              <a:rPr lang="en-US" altLang="zh-CN" dirty="0"/>
+              <a:t>·</a:t>
+            </a:r>
+            <a:r>
+              <a:rPr lang="zh-CN" altLang="en-US" dirty="0"/>
+              <a:t>汪斯崔斯、</a:t>
+            </a:r>
+            <a:r>
+              <a:rPr lang="en-US" altLang="zh-CN" dirty="0"/>
+              <a:t>P·J·</a:t>
+            </a:r>
+            <a:r>
+              <a:rPr lang="zh-CN" altLang="en-US" dirty="0"/>
+              <a:t>海特和汤姆</a:t>
+            </a:r>
+            <a:r>
+              <a:rPr lang="en-US" altLang="zh-CN" dirty="0"/>
+              <a:t>·</a:t>
+            </a:r>
+            <a:r>
+              <a:rPr lang="zh-CN" altLang="en-US" dirty="0"/>
+              <a:t>普雷斯顿</a:t>
+            </a:r>
+            <a:r>
+              <a:rPr lang="en-US" altLang="zh-CN" dirty="0"/>
+              <a:t>·</a:t>
+            </a:r>
+            <a:r>
+              <a:rPr lang="zh-CN" altLang="en-US" dirty="0"/>
+              <a:t>沃纳使用</a:t>
+            </a:r>
+            <a:r>
+              <a:rPr lang="en-US" altLang="zh-CN" dirty="0"/>
+              <a:t>Ruby on Rails</a:t>
+            </a:r>
+            <a:r>
+              <a:rPr lang="zh-CN" altLang="en-US" dirty="0"/>
+              <a:t>编写而成。在</a:t>
+            </a:r>
+            <a:r>
+              <a:rPr lang="en-US" altLang="zh-CN" dirty="0"/>
+              <a:t>2018</a:t>
+            </a:r>
+            <a:r>
+              <a:rPr lang="zh-CN" altLang="en-US" dirty="0"/>
+              <a:t>年，</a:t>
+            </a:r>
+            <a:r>
+              <a:rPr lang="en-US" altLang="zh-CN" dirty="0"/>
+              <a:t>GitHub</a:t>
+            </a:r>
+            <a:r>
+              <a:rPr lang="zh-CN" altLang="en-US" dirty="0"/>
+              <a:t>被微软公司收购。</a:t>
+            </a:r>
+            <a:endParaRPr lang="en-US" altLang="zh-CN" dirty="0"/>
+          </a:p>
+          <a:p>
+            <a:r>
+              <a:rPr lang="en-US" altLang="zh-CN" dirty="0"/>
+              <a:t>Git</a:t>
+            </a:r>
+            <a:r>
+              <a:rPr lang="zh-CN" altLang="en-US" dirty="0"/>
+              <a:t>的使用之后将在之后介绍。</a:t>
+            </a:r>
+          </a:p>
+        </p:txBody>
+      </p:sp>
+      <p:sp>
+        <p:nvSpPr>
+          <p:cNvPr id="12" name="文本框 11">
+            <a:extLst>
+              <a:ext uri="{FF2B5EF4-FFF2-40B4-BE49-F238E27FC236}">
+                <a16:creationId xmlns:a16="http://schemas.microsoft.com/office/drawing/2014/main" id="{F4B9CE43-34BA-5B86-040A-3520C9F04294}"/>
+              </a:ext>
+            </a:extLst>
+          </p:cNvPr>
+          <p:cNvSpPr txBox="1"/>
+          <p:nvPr/>
+        </p:nvSpPr>
+        <p:spPr>
+          <a:xfrm>
+            <a:off x="1623646" y="2493001"/>
+            <a:ext cx="7971692" cy="2031325"/>
+          </a:xfrm>
+          <a:prstGeom prst="rect">
+            <a:avLst/>
+          </a:prstGeom>
+          <a:noFill/>
+        </p:spPr>
+        <p:txBody>
+          <a:bodyPr wrap="square">
+            <a:spAutoFit/>
+          </a:bodyPr>
+          <a:lstStyle/>
+          <a:p>
+            <a:r>
+              <a:rPr lang="zh-CN" altLang="en-US" b="1" dirty="0"/>
+              <a:t>安装</a:t>
+            </a:r>
+            <a:endParaRPr lang="en-US" altLang="zh-CN" b="1" dirty="0"/>
+          </a:p>
+          <a:p>
+            <a:r>
+              <a:rPr lang="zh-CN" altLang="en-US" dirty="0"/>
+              <a:t>可以下载</a:t>
+            </a:r>
+            <a:r>
+              <a:rPr lang="en-US" altLang="zh-CN" dirty="0" err="1"/>
+              <a:t>github</a:t>
+            </a:r>
+            <a:r>
+              <a:rPr lang="zh-CN" altLang="en-US" dirty="0"/>
+              <a:t>桌面应用或直接下载</a:t>
+            </a:r>
+            <a:r>
+              <a:rPr lang="en-US" altLang="zh-CN" dirty="0"/>
+              <a:t>git</a:t>
+            </a:r>
+            <a:r>
+              <a:rPr lang="zh-CN" altLang="en-US" dirty="0"/>
+              <a:t>工具。</a:t>
+            </a:r>
+            <a:endParaRPr lang="en-US" altLang="zh-CN" dirty="0"/>
+          </a:p>
+          <a:p>
+            <a:endParaRPr lang="en-US" altLang="zh-CN" dirty="0"/>
+          </a:p>
+          <a:p>
+            <a:r>
+              <a:rPr lang="en-US" altLang="zh-CN" dirty="0"/>
+              <a:t>Linux</a:t>
+            </a:r>
+            <a:r>
+              <a:rPr lang="zh-CN" altLang="en-US" dirty="0"/>
+              <a:t>： </a:t>
+            </a:r>
+            <a:r>
+              <a:rPr lang="en-US" altLang="zh-CN" dirty="0" err="1"/>
+              <a:t>sudo</a:t>
+            </a:r>
+            <a:r>
+              <a:rPr lang="en-US" altLang="zh-CN" dirty="0"/>
+              <a:t> apt install git</a:t>
+            </a:r>
+          </a:p>
+          <a:p>
+            <a:r>
+              <a:rPr lang="en-US" altLang="zh-CN" dirty="0"/>
+              <a:t>MacOS: brew install git</a:t>
+            </a:r>
+          </a:p>
+          <a:p>
+            <a:r>
+              <a:rPr lang="en-US" altLang="zh-CN" dirty="0"/>
+              <a:t>Windows:  </a:t>
+            </a:r>
+            <a:r>
+              <a:rPr lang="zh-CN" altLang="en-US" dirty="0"/>
+              <a:t>去官网下载</a:t>
+            </a:r>
+            <a:r>
+              <a:rPr lang="en-US" altLang="zh-CN" dirty="0">
+                <a:hlinkClick r:id="rId2"/>
+              </a:rPr>
+              <a:t>https://git-scm.com/downloads</a:t>
+            </a:r>
+            <a:endParaRPr lang="en-US" altLang="zh-CN" dirty="0"/>
+          </a:p>
+          <a:p>
+            <a:r>
+              <a:rPr lang="en-US" altLang="zh-CN" dirty="0"/>
+              <a:t>	</a:t>
+            </a:r>
+            <a:r>
+              <a:rPr lang="zh-CN" altLang="en-US" dirty="0"/>
+              <a:t>不确定是否会自动添加到环境变量，如果没添加那就手动添加一下</a:t>
+            </a:r>
+          </a:p>
+        </p:txBody>
+      </p:sp>
+      <p:pic>
+        <p:nvPicPr>
+          <p:cNvPr id="14" name="图片 13">
+            <a:extLst>
+              <a:ext uri="{FF2B5EF4-FFF2-40B4-BE49-F238E27FC236}">
+                <a16:creationId xmlns:a16="http://schemas.microsoft.com/office/drawing/2014/main" id="{39BB9AC8-9604-F0C8-B680-545AD6B0BF3B}"/>
+              </a:ext>
+            </a:extLst>
+          </p:cNvPr>
+          <p:cNvPicPr>
+            <a:picLocks noChangeAspect="1"/>
+          </p:cNvPicPr>
+          <p:nvPr/>
+        </p:nvPicPr>
+        <p:blipFill>
+          <a:blip r:embed="rId3"/>
+          <a:stretch>
+            <a:fillRect/>
+          </a:stretch>
+        </p:blipFill>
+        <p:spPr>
+          <a:xfrm>
+            <a:off x="1688123" y="4683652"/>
+            <a:ext cx="6473340" cy="1308690"/>
+          </a:xfrm>
+          <a:prstGeom prst="rect">
+            <a:avLst/>
+          </a:prstGeom>
+        </p:spPr>
+      </p:pic>
+      <p:sp>
+        <p:nvSpPr>
+          <p:cNvPr id="15" name="文本框 14">
+            <a:extLst>
+              <a:ext uri="{FF2B5EF4-FFF2-40B4-BE49-F238E27FC236}">
+                <a16:creationId xmlns:a16="http://schemas.microsoft.com/office/drawing/2014/main" id="{76665CE0-AE53-F44B-6B7B-AD9183188C1D}"/>
+              </a:ext>
+            </a:extLst>
+          </p:cNvPr>
+          <p:cNvSpPr txBox="1"/>
+          <p:nvPr/>
+        </p:nvSpPr>
+        <p:spPr>
+          <a:xfrm>
+            <a:off x="8258907" y="5153331"/>
+            <a:ext cx="877163" cy="369332"/>
+          </a:xfrm>
+          <a:prstGeom prst="rect">
+            <a:avLst/>
+          </a:prstGeom>
+          <a:noFill/>
+        </p:spPr>
+        <p:txBody>
+          <a:bodyPr wrap="none" rtlCol="0">
+            <a:spAutoFit/>
+          </a:bodyPr>
+          <a:lstStyle/>
+          <a:p>
+            <a:r>
+              <a:rPr lang="en-US" altLang="zh-CN" dirty="0">
+                <a:sym typeface="Wingdings" panose="05000000000000000000" pitchFamily="2" charset="2"/>
+              </a:rPr>
+              <a:t></a:t>
+            </a:r>
+            <a:r>
+              <a:rPr lang="zh-CN" altLang="en-US" dirty="0"/>
+              <a:t>成功</a:t>
             </a:r>
           </a:p>
         </p:txBody>
@@ -10812,7 +11011,7 @@
     </p:spTree>
     <p:extLst>
       <p:ext uri="{BB962C8B-B14F-4D97-AF65-F5344CB8AC3E}">
-        <p14:creationId xmlns:p14="http://schemas.microsoft.com/office/powerpoint/2010/main" val="3586566790"/>
+        <p14:creationId xmlns:p14="http://schemas.microsoft.com/office/powerpoint/2010/main" val="2356378921"/>
       </p:ext>
     </p:extLst>
   </p:cSld>
@@ -11253,6 +11452,527 @@
                 <a:cs typeface="+mn-ea"/>
                 <a:sym typeface="+mn-lt"/>
               </a:rPr>
+              <a:t>我们的电控代码仓库</a:t>
+            </a:r>
+            <a:endParaRPr lang="en-US" altLang="zh-CN" sz="2400" dirty="0">
+              <a:solidFill>
+                <a:srgbClr val="2B3E54"/>
+              </a:solidFill>
+              <a:cs typeface="+mn-ea"/>
+              <a:sym typeface="+mn-lt"/>
+            </a:endParaRPr>
+          </a:p>
+        </p:txBody>
+      </p:sp>
+      <p:pic>
+        <p:nvPicPr>
+          <p:cNvPr id="5" name="图片 4">
+            <a:extLst>
+              <a:ext uri="{FF2B5EF4-FFF2-40B4-BE49-F238E27FC236}">
+                <a16:creationId xmlns:a16="http://schemas.microsoft.com/office/drawing/2014/main" id="{4CCF9C39-B76C-84C6-A40D-0090EFC93B65}"/>
+              </a:ext>
+            </a:extLst>
+          </p:cNvPr>
+          <p:cNvPicPr>
+            <a:picLocks noChangeAspect="1"/>
+          </p:cNvPicPr>
+          <p:nvPr/>
+        </p:nvPicPr>
+        <p:blipFill>
+          <a:blip r:embed="rId2"/>
+          <a:stretch>
+            <a:fillRect/>
+          </a:stretch>
+        </p:blipFill>
+        <p:spPr>
+          <a:xfrm>
+            <a:off x="1090245" y="1672691"/>
+            <a:ext cx="7057293" cy="3923223"/>
+          </a:xfrm>
+          <a:prstGeom prst="rect">
+            <a:avLst/>
+          </a:prstGeom>
+        </p:spPr>
+      </p:pic>
+      <p:sp>
+        <p:nvSpPr>
+          <p:cNvPr id="7" name="文本框 6">
+            <a:extLst>
+              <a:ext uri="{FF2B5EF4-FFF2-40B4-BE49-F238E27FC236}">
+                <a16:creationId xmlns:a16="http://schemas.microsoft.com/office/drawing/2014/main" id="{D8E1BBC3-EAF2-36BC-96AE-8CED7C3FCC04}"/>
+              </a:ext>
+            </a:extLst>
+          </p:cNvPr>
+          <p:cNvSpPr txBox="1"/>
+          <p:nvPr/>
+        </p:nvSpPr>
+        <p:spPr>
+          <a:xfrm>
+            <a:off x="1090245" y="1118092"/>
+            <a:ext cx="6096000" cy="369332"/>
+          </a:xfrm>
+          <a:prstGeom prst="rect">
+            <a:avLst/>
+          </a:prstGeom>
+          <a:noFill/>
+        </p:spPr>
+        <p:txBody>
+          <a:bodyPr wrap="square">
+            <a:spAutoFit/>
+          </a:bodyPr>
+          <a:lstStyle/>
+          <a:p>
+            <a:r>
+              <a:rPr lang="zh-CN" altLang="en-US" dirty="0"/>
+              <a:t>https://github.com/Meta-Team/Meta-Embedded</a:t>
+            </a:r>
+          </a:p>
+        </p:txBody>
+      </p:sp>
+    </p:spTree>
+    <p:extLst>
+      <p:ext uri="{BB962C8B-B14F-4D97-AF65-F5344CB8AC3E}">
+        <p14:creationId xmlns:p14="http://schemas.microsoft.com/office/powerpoint/2010/main" val="3586566790"/>
+      </p:ext>
+    </p:extLst>
+  </p:cSld>
+  <p:clrMapOvr>
+    <a:masterClrMapping/>
+  </p:clrMapOvr>
+  <p:timing>
+    <p:tnLst>
+      <p:par>
+        <p:cTn id="1" dur="indefinite" restart="never" nodeType="tmRoot">
+          <p:childTnLst>
+            <p:seq concurrent="1" nextAc="seek">
+              <p:cTn id="2" dur="indefinite" nodeType="mainSeq">
+                <p:childTnLst>
+                  <p:par>
+                    <p:cTn id="3" fill="hold">
+                      <p:stCondLst>
+                        <p:cond delay="indefinite"/>
+                        <p:cond evt="onBegin" delay="0">
+                          <p:tn val="2"/>
+                        </p:cond>
+                      </p:stCondLst>
+                      <p:childTnLst>
+                        <p:par>
+                          <p:cTn id="4" fill="hold">
+                            <p:stCondLst>
+                              <p:cond delay="0"/>
+                            </p:stCondLst>
+                            <p:childTnLst>
+                              <p:par>
+                                <p:cTn id="5" presetID="15" presetClass="entr" presetSubtype="0" fill="hold" grpId="0" nodeType="afterEffect">
+                                  <p:stCondLst>
+                                    <p:cond delay="0"/>
+                                  </p:stCondLst>
+                                  <p:childTnLst>
+                                    <p:set>
+                                      <p:cBhvr>
+                                        <p:cTn id="6" dur="1" fill="hold">
+                                          <p:stCondLst>
+                                            <p:cond delay="0"/>
+                                          </p:stCondLst>
+                                        </p:cTn>
+                                        <p:tgtEl>
+                                          <p:spTgt spid="4"/>
+                                        </p:tgtEl>
+                                        <p:attrNameLst>
+                                          <p:attrName>style.visibility</p:attrName>
+                                        </p:attrNameLst>
+                                      </p:cBhvr>
+                                      <p:to>
+                                        <p:strVal val="visible"/>
+                                      </p:to>
+                                    </p:set>
+                                    <p:anim calcmode="lin" valueType="num">
+                                      <p:cBhvr>
+                                        <p:cTn id="7" dur="1000" fill="hold"/>
+                                        <p:tgtEl>
+                                          <p:spTgt spid="4"/>
+                                        </p:tgtEl>
+                                        <p:attrNameLst>
+                                          <p:attrName>ppt_w</p:attrName>
+                                        </p:attrNameLst>
+                                      </p:cBhvr>
+                                      <p:tavLst>
+                                        <p:tav tm="0">
+                                          <p:val>
+                                            <p:fltVal val="0"/>
+                                          </p:val>
+                                        </p:tav>
+                                        <p:tav tm="100000">
+                                          <p:val>
+                                            <p:strVal val="#ppt_w"/>
+                                          </p:val>
+                                        </p:tav>
+                                      </p:tavLst>
+                                    </p:anim>
+                                    <p:anim calcmode="lin" valueType="num">
+                                      <p:cBhvr>
+                                        <p:cTn id="8" dur="1000" fill="hold"/>
+                                        <p:tgtEl>
+                                          <p:spTgt spid="4"/>
+                                        </p:tgtEl>
+                                        <p:attrNameLst>
+                                          <p:attrName>ppt_h</p:attrName>
+                                        </p:attrNameLst>
+                                      </p:cBhvr>
+                                      <p:tavLst>
+                                        <p:tav tm="0">
+                                          <p:val>
+                                            <p:fltVal val="0"/>
+                                          </p:val>
+                                        </p:tav>
+                                        <p:tav tm="100000">
+                                          <p:val>
+                                            <p:strVal val="#ppt_h"/>
+                                          </p:val>
+                                        </p:tav>
+                                      </p:tavLst>
+                                    </p:anim>
+                                    <p:anim calcmode="lin" valueType="num">
+                                      <p:cBhvr>
+                                        <p:cTn id="9" dur="1000" fill="hold"/>
+                                        <p:tgtEl>
+                                          <p:spTgt spid="4"/>
+                                        </p:tgtEl>
+                                        <p:attrNameLst>
+                                          <p:attrName>ppt_x</p:attrName>
+                                        </p:attrNameLst>
+                                      </p:cBhvr>
+                                      <p:tavLst>
+                                        <p:tav tm="0" fmla="#ppt_x+(cos(-2*pi*(1-$))*-#ppt_x-sin(-2*pi*(1-$))*(1-#ppt_y))*(1-$)">
+                                          <p:val>
+                                            <p:fltVal val="0"/>
+                                          </p:val>
+                                        </p:tav>
+                                        <p:tav tm="100000">
+                                          <p:val>
+                                            <p:fltVal val="1"/>
+                                          </p:val>
+                                        </p:tav>
+                                      </p:tavLst>
+                                    </p:anim>
+                                    <p:anim calcmode="lin" valueType="num">
+                                      <p:cBhvr>
+                                        <p:cTn id="10" dur="1000" fill="hold"/>
+                                        <p:tgtEl>
+                                          <p:spTgt spid="4"/>
+                                        </p:tgtEl>
+                                        <p:attrNameLst>
+                                          <p:attrName>ppt_y</p:attrName>
+                                        </p:attrNameLst>
+                                      </p:cBhvr>
+                                      <p:tavLst>
+                                        <p:tav tm="0" fmla="#ppt_y+(sin(-2*pi*(1-$))*-#ppt_x+cos(-2*pi*(1-$))*(1-#ppt_y))*(1-$)">
+                                          <p:val>
+                                            <p:fltVal val="0"/>
+                                          </p:val>
+                                        </p:tav>
+                                        <p:tav tm="100000">
+                                          <p:val>
+                                            <p:fltVal val="1"/>
+                                          </p:val>
+                                        </p:tav>
+                                      </p:tavLst>
+                                    </p:anim>
+                                  </p:childTnLst>
+                                </p:cTn>
+                              </p:par>
+                            </p:childTnLst>
+                          </p:cTn>
+                        </p:par>
+                      </p:childTnLst>
+                    </p:cTn>
+                  </p:par>
+                </p:childTnLst>
+              </p:cTn>
+              <p:prevCondLst>
+                <p:cond evt="onPrev" delay="0">
+                  <p:tgtEl>
+                    <p:sldTgt/>
+                  </p:tgtEl>
+                </p:cond>
+              </p:prevCondLst>
+              <p:nextCondLst>
+                <p:cond evt="onNext" delay="0">
+                  <p:tgtEl>
+                    <p:sldTgt/>
+                  </p:tgtEl>
+                </p:cond>
+              </p:nextCondLst>
+            </p:seq>
+          </p:childTnLst>
+        </p:cTn>
+      </p:par>
+    </p:tnLst>
+    <p:bldLst>
+      <p:bldP spid="4" grpId="0"/>
+    </p:bldLst>
+  </p:timing>
+</p:sld>
+</file>
+
+<file path=ppt/slides/slide17.xml><?xml version="1.0" encoding="utf-8"?>
+<p:sld xmlns:a="http://schemas.openxmlformats.org/drawingml/2006/main" xmlns:r="http://schemas.openxmlformats.org/officeDocument/2006/relationships" xmlns:p="http://schemas.openxmlformats.org/presentationml/2006/main">
+  <p:cSld>
+    <p:spTree>
+      <p:nvGrpSpPr>
+        <p:cNvPr id="1" name=""/>
+        <p:cNvGrpSpPr/>
+        <p:nvPr/>
+      </p:nvGrpSpPr>
+      <p:grpSpPr>
+        <a:xfrm>
+          <a:off x="0" y="0"/>
+          <a:ext cx="0" cy="0"/>
+          <a:chOff x="0" y="0"/>
+          <a:chExt cx="0" cy="0"/>
+        </a:xfrm>
+      </p:grpSpPr>
+      <p:sp>
+        <p:nvSpPr>
+          <p:cNvPr id="2" name="Freeform 15">
+            <a:extLst>
+              <a:ext uri="{FF2B5EF4-FFF2-40B4-BE49-F238E27FC236}">
+                <a16:creationId xmlns:a16="http://schemas.microsoft.com/office/drawing/2014/main" id="{7956E56C-C3F1-4DDA-8C0D-5A3212DAD5CF}"/>
+              </a:ext>
+            </a:extLst>
+          </p:cNvPr>
+          <p:cNvSpPr>
+            <a:spLocks/>
+          </p:cNvSpPr>
+          <p:nvPr/>
+        </p:nvSpPr>
+        <p:spPr bwMode="auto">
+          <a:xfrm>
+            <a:off x="389654" y="391902"/>
+            <a:ext cx="487234" cy="562546"/>
+          </a:xfrm>
+          <a:custGeom>
+            <a:avLst/>
+            <a:gdLst>
+              <a:gd name="T0" fmla="*/ 0 w 1171"/>
+              <a:gd name="T1" fmla="*/ 1014 h 1352"/>
+              <a:gd name="T2" fmla="*/ 0 w 1171"/>
+              <a:gd name="T3" fmla="*/ 338 h 1352"/>
+              <a:gd name="T4" fmla="*/ 586 w 1171"/>
+              <a:gd name="T5" fmla="*/ 0 h 1352"/>
+              <a:gd name="T6" fmla="*/ 1171 w 1171"/>
+              <a:gd name="T7" fmla="*/ 338 h 1352"/>
+              <a:gd name="T8" fmla="*/ 1171 w 1171"/>
+              <a:gd name="T9" fmla="*/ 1014 h 1352"/>
+              <a:gd name="T10" fmla="*/ 586 w 1171"/>
+              <a:gd name="T11" fmla="*/ 1352 h 1352"/>
+              <a:gd name="T12" fmla="*/ 0 w 1171"/>
+              <a:gd name="T13" fmla="*/ 1014 h 1352"/>
+            </a:gdLst>
+            <a:ahLst/>
+            <a:cxnLst>
+              <a:cxn ang="0">
+                <a:pos x="T0" y="T1"/>
+              </a:cxn>
+              <a:cxn ang="0">
+                <a:pos x="T2" y="T3"/>
+              </a:cxn>
+              <a:cxn ang="0">
+                <a:pos x="T4" y="T5"/>
+              </a:cxn>
+              <a:cxn ang="0">
+                <a:pos x="T6" y="T7"/>
+              </a:cxn>
+              <a:cxn ang="0">
+                <a:pos x="T8" y="T9"/>
+              </a:cxn>
+              <a:cxn ang="0">
+                <a:pos x="T10" y="T11"/>
+              </a:cxn>
+              <a:cxn ang="0">
+                <a:pos x="T12" y="T13"/>
+              </a:cxn>
+            </a:cxnLst>
+            <a:rect l="0" t="0" r="r" b="b"/>
+            <a:pathLst>
+              <a:path w="1171" h="1352">
+                <a:moveTo>
+                  <a:pt x="0" y="1014"/>
+                </a:moveTo>
+                <a:lnTo>
+                  <a:pt x="0" y="338"/>
+                </a:lnTo>
+                <a:lnTo>
+                  <a:pt x="586" y="0"/>
+                </a:lnTo>
+                <a:lnTo>
+                  <a:pt x="1171" y="338"/>
+                </a:lnTo>
+                <a:lnTo>
+                  <a:pt x="1171" y="1014"/>
+                </a:lnTo>
+                <a:lnTo>
+                  <a:pt x="586" y="1352"/>
+                </a:lnTo>
+                <a:lnTo>
+                  <a:pt x="0" y="1014"/>
+                </a:lnTo>
+                <a:close/>
+              </a:path>
+            </a:pathLst>
+          </a:custGeom>
+          <a:solidFill>
+            <a:srgbClr val="2B3E54"/>
+          </a:solidFill>
+          <a:ln>
+            <a:noFill/>
+          </a:ln>
+        </p:spPr>
+        <p:txBody>
+          <a:bodyPr vert="horz" wrap="square" lIns="91440" tIns="45720" rIns="91440" bIns="45720" numCol="1" anchor="t" anchorCtr="0" compatLnSpc="1">
+            <a:prstTxWarp prst="textNoShape">
+              <a:avLst/>
+            </a:prstTxWarp>
+          </a:bodyPr>
+          <a:lstStyle/>
+          <a:p>
+            <a:endParaRPr lang="zh-CN" altLang="en-US" sz="2133" dirty="0">
+              <a:cs typeface="+mn-ea"/>
+              <a:sym typeface="+mn-lt"/>
+            </a:endParaRPr>
+          </a:p>
+        </p:txBody>
+      </p:sp>
+      <p:sp>
+        <p:nvSpPr>
+          <p:cNvPr id="4" name="文本框 8">
+            <a:extLst>
+              <a:ext uri="{FF2B5EF4-FFF2-40B4-BE49-F238E27FC236}">
+                <a16:creationId xmlns:a16="http://schemas.microsoft.com/office/drawing/2014/main" id="{EFA8AEF7-CAE9-495F-AC4C-2B1E9B3AA0F7}"/>
+              </a:ext>
+            </a:extLst>
+          </p:cNvPr>
+          <p:cNvSpPr txBox="1"/>
+          <p:nvPr/>
+        </p:nvSpPr>
+        <p:spPr>
+          <a:xfrm>
+            <a:off x="979905" y="471160"/>
+            <a:ext cx="4043433" cy="461665"/>
+          </a:xfrm>
+          <a:prstGeom prst="rect">
+            <a:avLst/>
+          </a:prstGeom>
+          <a:noFill/>
+        </p:spPr>
+        <p:txBody>
+          <a:bodyPr wrap="square" lIns="91440" tIns="45720" rIns="91440" bIns="45720" rtlCol="0">
+            <a:spAutoFit/>
+          </a:bodyPr>
+          <a:lstStyle>
+            <a:defPPr>
+              <a:defRPr lang="zh-CN"/>
+            </a:defPPr>
+            <a:lvl1pPr marL="0" algn="l" defTabSz="914400" rtl="0" eaLnBrk="1" latinLnBrk="0" hangingPunct="1">
+              <a:defRPr sz="1800" kern="1200">
+                <a:solidFill>
+                  <a:schemeClr val="tx1"/>
+                </a:solidFill>
+                <a:latin typeface="+mn-lt"/>
+                <a:ea typeface="+mn-ea"/>
+                <a:cs typeface="+mn-cs"/>
+              </a:defRPr>
+            </a:lvl1pPr>
+            <a:lvl2pPr marL="457200" algn="l" defTabSz="914400" rtl="0" eaLnBrk="1" latinLnBrk="0" hangingPunct="1">
+              <a:defRPr sz="1800" kern="1200">
+                <a:solidFill>
+                  <a:schemeClr val="tx1"/>
+                </a:solidFill>
+                <a:latin typeface="+mn-lt"/>
+                <a:ea typeface="+mn-ea"/>
+                <a:cs typeface="+mn-cs"/>
+              </a:defRPr>
+            </a:lvl2pPr>
+            <a:lvl3pPr marL="914400" algn="l" defTabSz="914400" rtl="0" eaLnBrk="1" latinLnBrk="0" hangingPunct="1">
+              <a:defRPr sz="1800" kern="1200">
+                <a:solidFill>
+                  <a:schemeClr val="tx1"/>
+                </a:solidFill>
+                <a:latin typeface="+mn-lt"/>
+                <a:ea typeface="+mn-ea"/>
+                <a:cs typeface="+mn-cs"/>
+              </a:defRPr>
+            </a:lvl3pPr>
+            <a:lvl4pPr marL="1371600" algn="l" defTabSz="914400" rtl="0" eaLnBrk="1" latinLnBrk="0" hangingPunct="1">
+              <a:defRPr sz="1800" kern="1200">
+                <a:solidFill>
+                  <a:schemeClr val="tx1"/>
+                </a:solidFill>
+                <a:latin typeface="+mn-lt"/>
+                <a:ea typeface="+mn-ea"/>
+                <a:cs typeface="+mn-cs"/>
+              </a:defRPr>
+            </a:lvl4pPr>
+            <a:lvl5pPr marL="1828800" algn="l" defTabSz="914400" rtl="0" eaLnBrk="1" latinLnBrk="0" hangingPunct="1">
+              <a:defRPr sz="1800" kern="1200">
+                <a:solidFill>
+                  <a:schemeClr val="tx1"/>
+                </a:solidFill>
+                <a:latin typeface="+mn-lt"/>
+                <a:ea typeface="+mn-ea"/>
+                <a:cs typeface="+mn-cs"/>
+              </a:defRPr>
+            </a:lvl5pPr>
+            <a:lvl6pPr marL="2286000" algn="l" defTabSz="914400" rtl="0" eaLnBrk="1" latinLnBrk="0" hangingPunct="1">
+              <a:defRPr sz="1800" kern="1200">
+                <a:solidFill>
+                  <a:schemeClr val="tx1"/>
+                </a:solidFill>
+                <a:latin typeface="+mn-lt"/>
+                <a:ea typeface="+mn-ea"/>
+                <a:cs typeface="+mn-cs"/>
+              </a:defRPr>
+            </a:lvl6pPr>
+            <a:lvl7pPr marL="2743200" algn="l" defTabSz="914400" rtl="0" eaLnBrk="1" latinLnBrk="0" hangingPunct="1">
+              <a:defRPr sz="1800" kern="1200">
+                <a:solidFill>
+                  <a:schemeClr val="tx1"/>
+                </a:solidFill>
+                <a:latin typeface="+mn-lt"/>
+                <a:ea typeface="+mn-ea"/>
+                <a:cs typeface="+mn-cs"/>
+              </a:defRPr>
+            </a:lvl7pPr>
+            <a:lvl8pPr marL="3200400" algn="l" defTabSz="914400" rtl="0" eaLnBrk="1" latinLnBrk="0" hangingPunct="1">
+              <a:defRPr sz="1800" kern="1200">
+                <a:solidFill>
+                  <a:schemeClr val="tx1"/>
+                </a:solidFill>
+                <a:latin typeface="+mn-lt"/>
+                <a:ea typeface="+mn-ea"/>
+                <a:cs typeface="+mn-cs"/>
+              </a:defRPr>
+            </a:lvl8pPr>
+            <a:lvl9pPr marL="3657600" algn="l" defTabSz="914400" rtl="0" eaLnBrk="1" latinLnBrk="0" hangingPunct="1">
+              <a:defRPr sz="1800" kern="1200">
+                <a:solidFill>
+                  <a:schemeClr val="tx1"/>
+                </a:solidFill>
+                <a:latin typeface="+mn-lt"/>
+                <a:ea typeface="+mn-ea"/>
+                <a:cs typeface="+mn-cs"/>
+              </a:defRPr>
+            </a:lvl9pPr>
+          </a:lstStyle>
+          <a:p>
+            <a:r>
+              <a:rPr lang="zh-CN" altLang="en-US" sz="2400" dirty="0">
+                <a:solidFill>
+                  <a:srgbClr val="2B3E54"/>
+                </a:solidFill>
+                <a:cs typeface="+mn-ea"/>
+                <a:sym typeface="+mn-lt"/>
+              </a:rPr>
               <a:t>克隆一个仓库</a:t>
             </a:r>
             <a:endParaRPr lang="en-US" altLang="zh-CN" sz="2400" dirty="0">
@@ -11647,7 +12367,7 @@
 </p:sld>
 </file>
 
-<file path=ppt/slides/slide17.xml><?xml version="1.0" encoding="utf-8"?>
+<file path=ppt/slides/slide18.xml><?xml version="1.0" encoding="utf-8"?>
 <p:sld xmlns:a="http://schemas.openxmlformats.org/drawingml/2006/main" xmlns:r="http://schemas.openxmlformats.org/officeDocument/2006/relationships" xmlns:p="http://schemas.openxmlformats.org/presentationml/2006/main">
   <p:cSld>
     <p:spTree>
@@ -12323,7 +13043,7 @@
 </p:sld>
 </file>
 
-<file path=ppt/slides/slide18.xml><?xml version="1.0" encoding="utf-8"?>
+<file path=ppt/slides/slide19.xml><?xml version="1.0" encoding="utf-8"?>
 <p:sld xmlns:a="http://schemas.openxmlformats.org/drawingml/2006/main" xmlns:r="http://schemas.openxmlformats.org/officeDocument/2006/relationships" xmlns:p="http://schemas.openxmlformats.org/presentationml/2006/main">
   <p:cSld>
     <p:spTree>
@@ -12878,7 +13598,7 @@
                 <a:cs typeface="+mn-ea"/>
                 <a:sym typeface="+mn-lt"/>
               </a:rPr>
-              <a:t>（可选）自行先开始学习</a:t>
+              <a:t>自行先开始学习</a:t>
             </a:r>
             <a:r>
               <a:rPr lang="en-US" altLang="zh-CN" sz="2400" dirty="0">
@@ -12898,7 +13618,7 @@
                 <a:cs typeface="+mn-ea"/>
                 <a:sym typeface="+mn-lt"/>
               </a:rPr>
-              <a:t>有关知识</a:t>
+              <a:t>有关知识（选做）</a:t>
             </a:r>
             <a:endParaRPr lang="en-US" altLang="zh-CN" sz="2400" dirty="0">
               <a:solidFill>
@@ -12979,27 +13699,7 @@
                 <a:cs typeface="+mn-ea"/>
                 <a:sym typeface="+mn-lt"/>
               </a:rPr>
-              <a:t>库开发的视频进行自行观看（这部分以后不会</a:t>
-            </a:r>
-            <a:r>
-              <a:rPr lang="zh-CN" altLang="en-US" sz="2400">
-                <a:solidFill>
-                  <a:srgbClr val="2B3E54"/>
-                </a:solidFill>
-                <a:cs typeface="+mn-ea"/>
-                <a:sym typeface="+mn-lt"/>
-              </a:rPr>
-              <a:t>细讲，只会一笔带过，</a:t>
-            </a:r>
-            <a:r>
-              <a:rPr lang="zh-CN" altLang="en-US" sz="2400" dirty="0">
-                <a:solidFill>
-                  <a:srgbClr val="2B3E54"/>
-                </a:solidFill>
-                <a:cs typeface="+mn-ea"/>
-                <a:sym typeface="+mn-lt"/>
-              </a:rPr>
-              <a:t>想学懂的同学自行选择一套视频看完，当然准备学之前可以来问我们我们看看合不合适）</a:t>
+              <a:t>库开发的视频进行自行观看（这部分以后不会细讲，只会一笔带过，想学懂的同学自行选择一套视频看完，当然准备学之前可以来问我们我们看看合不合适）</a:t>
             </a:r>
             <a:endParaRPr lang="en-US" altLang="zh-CN" sz="2400" dirty="0">
               <a:solidFill>
@@ -13326,257 +14026,6 @@
 </p:sld>
 </file>
 
-<file path=ppt/slides/slide19.xml><?xml version="1.0" encoding="utf-8"?>
-<p:sld xmlns:a="http://schemas.openxmlformats.org/drawingml/2006/main" xmlns:r="http://schemas.openxmlformats.org/officeDocument/2006/relationships" xmlns:p="http://schemas.openxmlformats.org/presentationml/2006/main">
-  <p:cSld>
-    <p:spTree>
-      <p:nvGrpSpPr>
-        <p:cNvPr id="1" name=""/>
-        <p:cNvGrpSpPr/>
-        <p:nvPr/>
-      </p:nvGrpSpPr>
-      <p:grpSpPr>
-        <a:xfrm>
-          <a:off x="0" y="0"/>
-          <a:ext cx="0" cy="0"/>
-          <a:chOff x="0" y="0"/>
-          <a:chExt cx="0" cy="0"/>
-        </a:xfrm>
-      </p:grpSpPr>
-      <p:sp>
-        <p:nvSpPr>
-          <p:cNvPr id="58" name="矩形 57"/>
-          <p:cNvSpPr/>
-          <p:nvPr/>
-        </p:nvSpPr>
-        <p:spPr>
-          <a:xfrm>
-            <a:off x="1578044" y="2850866"/>
-            <a:ext cx="3823483" cy="995209"/>
-          </a:xfrm>
-          <a:prstGeom prst="rect">
-            <a:avLst/>
-          </a:prstGeom>
-        </p:spPr>
-        <p:txBody>
-          <a:bodyPr wrap="none">
-            <a:spAutoFit/>
-          </a:bodyPr>
-          <a:lstStyle/>
-          <a:p>
-            <a:pPr eaLnBrk="0" hangingPunct="0"/>
-            <a:r>
-              <a:rPr lang="zh-CN" altLang="en-US" sz="5867" b="1" spc="-200" dirty="0">
-                <a:solidFill>
-                  <a:srgbClr val="0B1431"/>
-                </a:solidFill>
-                <a:cs typeface="+mn-ea"/>
-                <a:sym typeface="+mn-lt"/>
-              </a:rPr>
-              <a:t>谢谢观看！</a:t>
-            </a:r>
-          </a:p>
-        </p:txBody>
-      </p:sp>
-      <p:sp>
-        <p:nvSpPr>
-          <p:cNvPr id="2" name="矩形 1"/>
-          <p:cNvSpPr/>
-          <p:nvPr/>
-        </p:nvSpPr>
-        <p:spPr>
-          <a:xfrm>
-            <a:off x="1831891" y="3951199"/>
-            <a:ext cx="1248139" cy="60959"/>
-          </a:xfrm>
-          <a:prstGeom prst="rect">
-            <a:avLst/>
-          </a:prstGeom>
-          <a:solidFill>
-            <a:srgbClr val="0B1431"/>
-          </a:solidFill>
-          <a:ln>
-            <a:noFill/>
-          </a:ln>
-        </p:spPr>
-        <p:style>
-          <a:lnRef idx="2">
-            <a:schemeClr val="accent1">
-              <a:shade val="50000"/>
-            </a:schemeClr>
-          </a:lnRef>
-          <a:fillRef idx="1">
-            <a:schemeClr val="accent1"/>
-          </a:fillRef>
-          <a:effectRef idx="0">
-            <a:schemeClr val="accent1"/>
-          </a:effectRef>
-          <a:fontRef idx="minor">
-            <a:schemeClr val="lt1"/>
-          </a:fontRef>
-        </p:style>
-        <p:txBody>
-          <a:bodyPr rtlCol="0" anchor="ctr"/>
-          <a:lstStyle/>
-          <a:p>
-            <a:pPr algn="ctr"/>
-            <a:endParaRPr lang="zh-CN" altLang="en-US" sz="2400" dirty="0">
-              <a:solidFill>
-                <a:srgbClr val="0B1431"/>
-              </a:solidFill>
-              <a:cs typeface="+mn-ea"/>
-              <a:sym typeface="+mn-lt"/>
-            </a:endParaRPr>
-          </a:p>
-        </p:txBody>
-      </p:sp>
-    </p:spTree>
-    <p:extLst>
-      <p:ext uri="{BB962C8B-B14F-4D97-AF65-F5344CB8AC3E}">
-        <p14:creationId xmlns:p14="http://schemas.microsoft.com/office/powerpoint/2010/main" val="1326115690"/>
-      </p:ext>
-    </p:extLst>
-  </p:cSld>
-  <p:clrMapOvr>
-    <a:masterClrMapping/>
-  </p:clrMapOvr>
-  <mc:AlternateContent xmlns:mc="http://schemas.openxmlformats.org/markup-compatibility/2006" xmlns:p14="http://schemas.microsoft.com/office/powerpoint/2010/main">
-    <mc:Choice Requires="p14">
-      <p:transition spd="slow" p14:dur="2000" advTm="948">
-        <p14:vortex dir="r"/>
-      </p:transition>
-    </mc:Choice>
-    <mc:Fallback xmlns="">
-      <p:transition spd="slow" advTm="948">
-        <p:fade/>
-      </p:transition>
-    </mc:Fallback>
-  </mc:AlternateContent>
-  <p:timing>
-    <p:tnLst>
-      <p:par>
-        <p:cTn id="1" dur="indefinite" restart="never" nodeType="tmRoot">
-          <p:childTnLst>
-            <p:seq concurrent="1" nextAc="seek">
-              <p:cTn id="2" dur="indefinite" nodeType="mainSeq">
-                <p:childTnLst>
-                  <p:par>
-                    <p:cTn id="3" fill="hold">
-                      <p:stCondLst>
-                        <p:cond delay="indefinite"/>
-                        <p:cond evt="onBegin" delay="0">
-                          <p:tn val="2"/>
-                        </p:cond>
-                      </p:stCondLst>
-                      <p:childTnLst>
-                        <p:par>
-                          <p:cTn id="4" fill="hold">
-                            <p:stCondLst>
-                              <p:cond delay="0"/>
-                            </p:stCondLst>
-                            <p:childTnLst>
-                              <p:par>
-                                <p:cTn id="5" presetID="52" presetClass="entr" presetSubtype="0" fill="hold" grpId="0" nodeType="afterEffect">
-                                  <p:stCondLst>
-                                    <p:cond delay="0"/>
-                                  </p:stCondLst>
-                                  <p:iterate type="lt">
-                                    <p:tmPct val="10000"/>
-                                  </p:iterate>
-                                  <p:childTnLst>
-                                    <p:set>
-                                      <p:cBhvr>
-                                        <p:cTn id="6" dur="1" fill="hold">
-                                          <p:stCondLst>
-                                            <p:cond delay="0"/>
-                                          </p:stCondLst>
-                                        </p:cTn>
-                                        <p:tgtEl>
-                                          <p:spTgt spid="58"/>
-                                        </p:tgtEl>
-                                        <p:attrNameLst>
-                                          <p:attrName>style.visibility</p:attrName>
-                                        </p:attrNameLst>
-                                      </p:cBhvr>
-                                      <p:to>
-                                        <p:strVal val="visible"/>
-                                      </p:to>
-                                    </p:set>
-                                    <p:animScale>
-                                      <p:cBhvr>
-                                        <p:cTn id="7" dur="1000" decel="50000" fill="hold">
-                                          <p:stCondLst>
-                                            <p:cond delay="0"/>
-                                          </p:stCondLst>
-                                        </p:cTn>
-                                        <p:tgtEl>
-                                          <p:spTgt spid="58"/>
-                                        </p:tgtEl>
-                                      </p:cBhvr>
-                                      <p:from x="250000" y="250000"/>
-                                      <p:to x="100000" y="100000"/>
-                                    </p:animScale>
-                                    <p:animMotion origin="layout" path="M -0.46736 0.92887  C -0.37517 0.88508  -0.02552 0.75279  0.0908 0.66613  C  0.20747 0.57948  0.21649 0.50394  0.23177 0.40825  C 0.24705 0.31256  0.22118 0.15964   0.18264 0.09152  C 0.1441 0.02341  0.03802 0.0  0.0 0.0  " pathEditMode="relative" ptsTypes="">
-                                      <p:cBhvr>
-                                        <p:cTn id="8" dur="1000" decel="50000" fill="hold">
-                                          <p:stCondLst>
-                                            <p:cond delay="0"/>
-                                          </p:stCondLst>
-                                        </p:cTn>
-                                        <p:tgtEl>
-                                          <p:spTgt spid="58"/>
-                                        </p:tgtEl>
-                                        <p:attrNameLst>
-                                          <p:attrName>ppt_x</p:attrName>
-                                          <p:attrName>ppt_y</p:attrName>
-                                        </p:attrNameLst>
-                                      </p:cBhvr>
-                                    </p:animMotion>
-                                    <p:animEffect transition="in" filter="fade">
-                                      <p:cBhvr>
-                                        <p:cTn id="9" dur="1000"/>
-                                        <p:tgtEl>
-                                          <p:spTgt spid="58"/>
-                                        </p:tgtEl>
-                                      </p:cBhvr>
-                                    </p:animEffect>
-                                  </p:childTnLst>
-                                </p:cTn>
-                              </p:par>
-                            </p:childTnLst>
-                          </p:cTn>
-                        </p:par>
-                      </p:childTnLst>
-                    </p:cTn>
-                  </p:par>
-                </p:childTnLst>
-              </p:cTn>
-              <p:prevCondLst>
-                <p:cond evt="onPrev" delay="0">
-                  <p:tgtEl>
-                    <p:sldTgt/>
-                  </p:tgtEl>
-                </p:cond>
-              </p:prevCondLst>
-              <p:nextCondLst>
-                <p:cond evt="onNext" delay="0">
-                  <p:tgtEl>
-                    <p:sldTgt/>
-                  </p:tgtEl>
-                </p:cond>
-              </p:nextCondLst>
-            </p:seq>
-          </p:childTnLst>
-        </p:cTn>
-      </p:par>
-    </p:tnLst>
-    <p:bldLst>
-      <p:bldP spid="58" grpId="0"/>
-    </p:bldLst>
-  </p:timing>
-</p:sld>
-</file>
-
 <file path=ppt/slides/slide2.xml><?xml version="1.0" encoding="utf-8"?>
 <p:sld xmlns:a="http://schemas.openxmlformats.org/drawingml/2006/main" xmlns:r="http://schemas.openxmlformats.org/officeDocument/2006/relationships" xmlns:p="http://schemas.openxmlformats.org/presentationml/2006/main">
   <p:cSld>
@@ -14110,6 +14559,257 @@
     </p:tnLst>
     <p:bldLst>
       <p:bldP spid="4" grpId="0"/>
+    </p:bldLst>
+  </p:timing>
+</p:sld>
+</file>
+
+<file path=ppt/slides/slide20.xml><?xml version="1.0" encoding="utf-8"?>
+<p:sld xmlns:a="http://schemas.openxmlformats.org/drawingml/2006/main" xmlns:r="http://schemas.openxmlformats.org/officeDocument/2006/relationships" xmlns:p="http://schemas.openxmlformats.org/presentationml/2006/main">
+  <p:cSld>
+    <p:spTree>
+      <p:nvGrpSpPr>
+        <p:cNvPr id="1" name=""/>
+        <p:cNvGrpSpPr/>
+        <p:nvPr/>
+      </p:nvGrpSpPr>
+      <p:grpSpPr>
+        <a:xfrm>
+          <a:off x="0" y="0"/>
+          <a:ext cx="0" cy="0"/>
+          <a:chOff x="0" y="0"/>
+          <a:chExt cx="0" cy="0"/>
+        </a:xfrm>
+      </p:grpSpPr>
+      <p:sp>
+        <p:nvSpPr>
+          <p:cNvPr id="58" name="矩形 57"/>
+          <p:cNvSpPr/>
+          <p:nvPr/>
+        </p:nvSpPr>
+        <p:spPr>
+          <a:xfrm>
+            <a:off x="1578044" y="2850866"/>
+            <a:ext cx="3823483" cy="995209"/>
+          </a:xfrm>
+          <a:prstGeom prst="rect">
+            <a:avLst/>
+          </a:prstGeom>
+        </p:spPr>
+        <p:txBody>
+          <a:bodyPr wrap="none">
+            <a:spAutoFit/>
+          </a:bodyPr>
+          <a:lstStyle/>
+          <a:p>
+            <a:pPr eaLnBrk="0" hangingPunct="0"/>
+            <a:r>
+              <a:rPr lang="zh-CN" altLang="en-US" sz="5867" b="1" spc="-200" dirty="0">
+                <a:solidFill>
+                  <a:srgbClr val="0B1431"/>
+                </a:solidFill>
+                <a:cs typeface="+mn-ea"/>
+                <a:sym typeface="+mn-lt"/>
+              </a:rPr>
+              <a:t>谢谢观看！</a:t>
+            </a:r>
+          </a:p>
+        </p:txBody>
+      </p:sp>
+      <p:sp>
+        <p:nvSpPr>
+          <p:cNvPr id="2" name="矩形 1"/>
+          <p:cNvSpPr/>
+          <p:nvPr/>
+        </p:nvSpPr>
+        <p:spPr>
+          <a:xfrm>
+            <a:off x="1831891" y="3951199"/>
+            <a:ext cx="1248139" cy="60959"/>
+          </a:xfrm>
+          <a:prstGeom prst="rect">
+            <a:avLst/>
+          </a:prstGeom>
+          <a:solidFill>
+            <a:srgbClr val="0B1431"/>
+          </a:solidFill>
+          <a:ln>
+            <a:noFill/>
+          </a:ln>
+        </p:spPr>
+        <p:style>
+          <a:lnRef idx="2">
+            <a:schemeClr val="accent1">
+              <a:shade val="50000"/>
+            </a:schemeClr>
+          </a:lnRef>
+          <a:fillRef idx="1">
+            <a:schemeClr val="accent1"/>
+          </a:fillRef>
+          <a:effectRef idx="0">
+            <a:schemeClr val="accent1"/>
+          </a:effectRef>
+          <a:fontRef idx="minor">
+            <a:schemeClr val="lt1"/>
+          </a:fontRef>
+        </p:style>
+        <p:txBody>
+          <a:bodyPr rtlCol="0" anchor="ctr"/>
+          <a:lstStyle/>
+          <a:p>
+            <a:pPr algn="ctr"/>
+            <a:endParaRPr lang="zh-CN" altLang="en-US" sz="2400" dirty="0">
+              <a:solidFill>
+                <a:srgbClr val="0B1431"/>
+              </a:solidFill>
+              <a:cs typeface="+mn-ea"/>
+              <a:sym typeface="+mn-lt"/>
+            </a:endParaRPr>
+          </a:p>
+        </p:txBody>
+      </p:sp>
+    </p:spTree>
+    <p:extLst>
+      <p:ext uri="{BB962C8B-B14F-4D97-AF65-F5344CB8AC3E}">
+        <p14:creationId xmlns:p14="http://schemas.microsoft.com/office/powerpoint/2010/main" val="1326115690"/>
+      </p:ext>
+    </p:extLst>
+  </p:cSld>
+  <p:clrMapOvr>
+    <a:masterClrMapping/>
+  </p:clrMapOvr>
+  <mc:AlternateContent xmlns:mc="http://schemas.openxmlformats.org/markup-compatibility/2006" xmlns:p14="http://schemas.microsoft.com/office/powerpoint/2010/main">
+    <mc:Choice Requires="p14">
+      <p:transition spd="slow" p14:dur="2000" advTm="948">
+        <p14:vortex dir="r"/>
+      </p:transition>
+    </mc:Choice>
+    <mc:Fallback xmlns="">
+      <p:transition spd="slow" advTm="948">
+        <p:fade/>
+      </p:transition>
+    </mc:Fallback>
+  </mc:AlternateContent>
+  <p:timing>
+    <p:tnLst>
+      <p:par>
+        <p:cTn id="1" dur="indefinite" restart="never" nodeType="tmRoot">
+          <p:childTnLst>
+            <p:seq concurrent="1" nextAc="seek">
+              <p:cTn id="2" dur="indefinite" nodeType="mainSeq">
+                <p:childTnLst>
+                  <p:par>
+                    <p:cTn id="3" fill="hold">
+                      <p:stCondLst>
+                        <p:cond delay="indefinite"/>
+                        <p:cond evt="onBegin" delay="0">
+                          <p:tn val="2"/>
+                        </p:cond>
+                      </p:stCondLst>
+                      <p:childTnLst>
+                        <p:par>
+                          <p:cTn id="4" fill="hold">
+                            <p:stCondLst>
+                              <p:cond delay="0"/>
+                            </p:stCondLst>
+                            <p:childTnLst>
+                              <p:par>
+                                <p:cTn id="5" presetID="52" presetClass="entr" presetSubtype="0" fill="hold" grpId="0" nodeType="afterEffect">
+                                  <p:stCondLst>
+                                    <p:cond delay="0"/>
+                                  </p:stCondLst>
+                                  <p:iterate type="lt">
+                                    <p:tmPct val="10000"/>
+                                  </p:iterate>
+                                  <p:childTnLst>
+                                    <p:set>
+                                      <p:cBhvr>
+                                        <p:cTn id="6" dur="1" fill="hold">
+                                          <p:stCondLst>
+                                            <p:cond delay="0"/>
+                                          </p:stCondLst>
+                                        </p:cTn>
+                                        <p:tgtEl>
+                                          <p:spTgt spid="58"/>
+                                        </p:tgtEl>
+                                        <p:attrNameLst>
+                                          <p:attrName>style.visibility</p:attrName>
+                                        </p:attrNameLst>
+                                      </p:cBhvr>
+                                      <p:to>
+                                        <p:strVal val="visible"/>
+                                      </p:to>
+                                    </p:set>
+                                    <p:animScale>
+                                      <p:cBhvr>
+                                        <p:cTn id="7" dur="1000" decel="50000" fill="hold">
+                                          <p:stCondLst>
+                                            <p:cond delay="0"/>
+                                          </p:stCondLst>
+                                        </p:cTn>
+                                        <p:tgtEl>
+                                          <p:spTgt spid="58"/>
+                                        </p:tgtEl>
+                                      </p:cBhvr>
+                                      <p:from x="250000" y="250000"/>
+                                      <p:to x="100000" y="100000"/>
+                                    </p:animScale>
+                                    <p:animMotion origin="layout" path="M -0.46736 0.92887  C -0.37517 0.88508  -0.02552 0.75279  0.0908 0.66613  C  0.20747 0.57948  0.21649 0.50394  0.23177 0.40825  C 0.24705 0.31256  0.22118 0.15964   0.18264 0.09152  C 0.1441 0.02341  0.03802 0.0  0.0 0.0  " pathEditMode="relative" ptsTypes="">
+                                      <p:cBhvr>
+                                        <p:cTn id="8" dur="1000" decel="50000" fill="hold">
+                                          <p:stCondLst>
+                                            <p:cond delay="0"/>
+                                          </p:stCondLst>
+                                        </p:cTn>
+                                        <p:tgtEl>
+                                          <p:spTgt spid="58"/>
+                                        </p:tgtEl>
+                                        <p:attrNameLst>
+                                          <p:attrName>ppt_x</p:attrName>
+                                          <p:attrName>ppt_y</p:attrName>
+                                        </p:attrNameLst>
+                                      </p:cBhvr>
+                                    </p:animMotion>
+                                    <p:animEffect transition="in" filter="fade">
+                                      <p:cBhvr>
+                                        <p:cTn id="9" dur="1000"/>
+                                        <p:tgtEl>
+                                          <p:spTgt spid="58"/>
+                                        </p:tgtEl>
+                                      </p:cBhvr>
+                                    </p:animEffect>
+                                  </p:childTnLst>
+                                </p:cTn>
+                              </p:par>
+                            </p:childTnLst>
+                          </p:cTn>
+                        </p:par>
+                      </p:childTnLst>
+                    </p:cTn>
+                  </p:par>
+                </p:childTnLst>
+              </p:cTn>
+              <p:prevCondLst>
+                <p:cond evt="onPrev" delay="0">
+                  <p:tgtEl>
+                    <p:sldTgt/>
+                  </p:tgtEl>
+                </p:cond>
+              </p:prevCondLst>
+              <p:nextCondLst>
+                <p:cond evt="onNext" delay="0">
+                  <p:tgtEl>
+                    <p:sldTgt/>
+                  </p:tgtEl>
+                </p:cond>
+              </p:nextCondLst>
+            </p:seq>
+          </p:childTnLst>
+        </p:cTn>
+      </p:par>
+    </p:tnLst>
+    <p:bldLst>
+      <p:bldP spid="58" grpId="0"/>
     </p:bldLst>
   </p:timing>
 </p:sld>
@@ -26690,6 +27390,548 @@
         <p:spPr>
           <a:xfrm>
             <a:off x="979906" y="471160"/>
+            <a:ext cx="3187648" cy="461665"/>
+          </a:xfrm>
+          <a:prstGeom prst="rect">
+            <a:avLst/>
+          </a:prstGeom>
+          <a:noFill/>
+        </p:spPr>
+        <p:txBody>
+          <a:bodyPr wrap="square" lIns="91440" tIns="45720" rIns="91440" bIns="45720" rtlCol="0">
+            <a:spAutoFit/>
+          </a:bodyPr>
+          <a:lstStyle>
+            <a:defPPr>
+              <a:defRPr lang="zh-CN"/>
+            </a:defPPr>
+            <a:lvl1pPr marL="0" algn="l" defTabSz="914400" rtl="0" eaLnBrk="1" latinLnBrk="0" hangingPunct="1">
+              <a:defRPr sz="1800" kern="1200">
+                <a:solidFill>
+                  <a:schemeClr val="tx1"/>
+                </a:solidFill>
+                <a:latin typeface="+mn-lt"/>
+                <a:ea typeface="+mn-ea"/>
+                <a:cs typeface="+mn-cs"/>
+              </a:defRPr>
+            </a:lvl1pPr>
+            <a:lvl2pPr marL="457200" algn="l" defTabSz="914400" rtl="0" eaLnBrk="1" latinLnBrk="0" hangingPunct="1">
+              <a:defRPr sz="1800" kern="1200">
+                <a:solidFill>
+                  <a:schemeClr val="tx1"/>
+                </a:solidFill>
+                <a:latin typeface="+mn-lt"/>
+                <a:ea typeface="+mn-ea"/>
+                <a:cs typeface="+mn-cs"/>
+              </a:defRPr>
+            </a:lvl2pPr>
+            <a:lvl3pPr marL="914400" algn="l" defTabSz="914400" rtl="0" eaLnBrk="1" latinLnBrk="0" hangingPunct="1">
+              <a:defRPr sz="1800" kern="1200">
+                <a:solidFill>
+                  <a:schemeClr val="tx1"/>
+                </a:solidFill>
+                <a:latin typeface="+mn-lt"/>
+                <a:ea typeface="+mn-ea"/>
+                <a:cs typeface="+mn-cs"/>
+              </a:defRPr>
+            </a:lvl3pPr>
+            <a:lvl4pPr marL="1371600" algn="l" defTabSz="914400" rtl="0" eaLnBrk="1" latinLnBrk="0" hangingPunct="1">
+              <a:defRPr sz="1800" kern="1200">
+                <a:solidFill>
+                  <a:schemeClr val="tx1"/>
+                </a:solidFill>
+                <a:latin typeface="+mn-lt"/>
+                <a:ea typeface="+mn-ea"/>
+                <a:cs typeface="+mn-cs"/>
+              </a:defRPr>
+            </a:lvl4pPr>
+            <a:lvl5pPr marL="1828800" algn="l" defTabSz="914400" rtl="0" eaLnBrk="1" latinLnBrk="0" hangingPunct="1">
+              <a:defRPr sz="1800" kern="1200">
+                <a:solidFill>
+                  <a:schemeClr val="tx1"/>
+                </a:solidFill>
+                <a:latin typeface="+mn-lt"/>
+                <a:ea typeface="+mn-ea"/>
+                <a:cs typeface="+mn-cs"/>
+              </a:defRPr>
+            </a:lvl5pPr>
+            <a:lvl6pPr marL="2286000" algn="l" defTabSz="914400" rtl="0" eaLnBrk="1" latinLnBrk="0" hangingPunct="1">
+              <a:defRPr sz="1800" kern="1200">
+                <a:solidFill>
+                  <a:schemeClr val="tx1"/>
+                </a:solidFill>
+                <a:latin typeface="+mn-lt"/>
+                <a:ea typeface="+mn-ea"/>
+                <a:cs typeface="+mn-cs"/>
+              </a:defRPr>
+            </a:lvl6pPr>
+            <a:lvl7pPr marL="2743200" algn="l" defTabSz="914400" rtl="0" eaLnBrk="1" latinLnBrk="0" hangingPunct="1">
+              <a:defRPr sz="1800" kern="1200">
+                <a:solidFill>
+                  <a:schemeClr val="tx1"/>
+                </a:solidFill>
+                <a:latin typeface="+mn-lt"/>
+                <a:ea typeface="+mn-ea"/>
+                <a:cs typeface="+mn-cs"/>
+              </a:defRPr>
+            </a:lvl7pPr>
+            <a:lvl8pPr marL="3200400" algn="l" defTabSz="914400" rtl="0" eaLnBrk="1" latinLnBrk="0" hangingPunct="1">
+              <a:defRPr sz="1800" kern="1200">
+                <a:solidFill>
+                  <a:schemeClr val="tx1"/>
+                </a:solidFill>
+                <a:latin typeface="+mn-lt"/>
+                <a:ea typeface="+mn-ea"/>
+                <a:cs typeface="+mn-cs"/>
+              </a:defRPr>
+            </a:lvl8pPr>
+            <a:lvl9pPr marL="3657600" algn="l" defTabSz="914400" rtl="0" eaLnBrk="1" latinLnBrk="0" hangingPunct="1">
+              <a:defRPr sz="1800" kern="1200">
+                <a:solidFill>
+                  <a:schemeClr val="tx1"/>
+                </a:solidFill>
+                <a:latin typeface="+mn-lt"/>
+                <a:ea typeface="+mn-ea"/>
+                <a:cs typeface="+mn-cs"/>
+              </a:defRPr>
+            </a:lvl9pPr>
+          </a:lstStyle>
+          <a:p>
+            <a:r>
+              <a:rPr lang="zh-CN" altLang="en-US" sz="2400" dirty="0">
+                <a:solidFill>
+                  <a:srgbClr val="2B3E54"/>
+                </a:solidFill>
+                <a:cs typeface="+mn-ea"/>
+                <a:sym typeface="+mn-lt"/>
+              </a:rPr>
+              <a:t>本学期将学习：</a:t>
+            </a:r>
+            <a:endParaRPr lang="en-US" altLang="zh-CN" sz="2400" dirty="0">
+              <a:solidFill>
+                <a:srgbClr val="2B3E54"/>
+              </a:solidFill>
+              <a:cs typeface="+mn-ea"/>
+              <a:sym typeface="+mn-lt"/>
+            </a:endParaRPr>
+          </a:p>
+        </p:txBody>
+      </p:sp>
+      <p:sp>
+        <p:nvSpPr>
+          <p:cNvPr id="5" name="文本框 4">
+            <a:extLst>
+              <a:ext uri="{FF2B5EF4-FFF2-40B4-BE49-F238E27FC236}">
+                <a16:creationId xmlns:a16="http://schemas.microsoft.com/office/drawing/2014/main" id="{40ABDC08-30B0-9D4D-1C50-535AF8AD1FDC}"/>
+              </a:ext>
+            </a:extLst>
+          </p:cNvPr>
+          <p:cNvSpPr txBox="1"/>
+          <p:nvPr/>
+        </p:nvSpPr>
+        <p:spPr>
+          <a:xfrm>
+            <a:off x="2441330" y="2121877"/>
+            <a:ext cx="7309339" cy="2308324"/>
+          </a:xfrm>
+          <a:prstGeom prst="rect">
+            <a:avLst/>
+          </a:prstGeom>
+          <a:noFill/>
+        </p:spPr>
+        <p:txBody>
+          <a:bodyPr wrap="square" rtlCol="0">
+            <a:spAutoFit/>
+          </a:bodyPr>
+          <a:lstStyle/>
+          <a:p>
+            <a:r>
+              <a:rPr lang="zh-CN" altLang="en-US" sz="2400" b="1" dirty="0"/>
+              <a:t>自学内容：</a:t>
+            </a:r>
+            <a:r>
+              <a:rPr lang="en-US" altLang="zh-CN" sz="2400" b="1" dirty="0"/>
+              <a:t>C++</a:t>
+            </a:r>
+            <a:r>
+              <a:rPr lang="zh-CN" altLang="en-US" sz="2400" b="1" dirty="0"/>
+              <a:t>为主</a:t>
+            </a:r>
+            <a:endParaRPr lang="en-US" altLang="zh-CN" sz="2400" b="1" dirty="0"/>
+          </a:p>
+          <a:p>
+            <a:endParaRPr lang="en-US" altLang="zh-CN" sz="2400" b="1" dirty="0"/>
+          </a:p>
+          <a:p>
+            <a:r>
+              <a:rPr lang="zh-CN" altLang="en-US" sz="2400" b="1" dirty="0"/>
+              <a:t>前期：常用工具链和</a:t>
+            </a:r>
+            <a:r>
+              <a:rPr lang="en-US" altLang="zh-CN" sz="2400" b="1" dirty="0"/>
+              <a:t>C++</a:t>
+            </a:r>
+          </a:p>
+          <a:p>
+            <a:r>
+              <a:rPr lang="zh-CN" altLang="en-US" sz="2400" b="1" dirty="0"/>
+              <a:t>后期：</a:t>
+            </a:r>
+            <a:r>
+              <a:rPr lang="en-US" altLang="zh-CN" sz="2400" b="1" dirty="0"/>
+              <a:t>STM32</a:t>
+            </a:r>
+            <a:r>
+              <a:rPr lang="zh-CN" altLang="en-US" sz="2400" b="1" dirty="0"/>
+              <a:t>上手开发，以及各种通信协议</a:t>
+            </a:r>
+            <a:endParaRPr lang="en-US" altLang="zh-CN" sz="2400" b="1" dirty="0"/>
+          </a:p>
+          <a:p>
+            <a:endParaRPr lang="en-US" altLang="zh-CN" sz="2400" b="1" dirty="0"/>
+          </a:p>
+          <a:p>
+            <a:r>
+              <a:rPr lang="zh-CN" altLang="en-US" sz="2400" b="1" dirty="0"/>
+              <a:t>下个学期：</a:t>
+            </a:r>
+            <a:r>
+              <a:rPr lang="en-US" altLang="zh-CN" sz="2400" b="1" dirty="0"/>
+              <a:t>ROS2</a:t>
+            </a:r>
+            <a:endParaRPr lang="zh-CN" altLang="en-US" sz="2400" b="1" dirty="0"/>
+          </a:p>
+        </p:txBody>
+      </p:sp>
+    </p:spTree>
+    <p:extLst>
+      <p:ext uri="{BB962C8B-B14F-4D97-AF65-F5344CB8AC3E}">
+        <p14:creationId xmlns:p14="http://schemas.microsoft.com/office/powerpoint/2010/main" val="3863451501"/>
+      </p:ext>
+    </p:extLst>
+  </p:cSld>
+  <p:clrMapOvr>
+    <a:masterClrMapping/>
+  </p:clrMapOvr>
+  <p:timing>
+    <p:tnLst>
+      <p:par>
+        <p:cTn id="1" dur="indefinite" restart="never" nodeType="tmRoot">
+          <p:childTnLst>
+            <p:seq concurrent="1" nextAc="seek">
+              <p:cTn id="2" dur="indefinite" nodeType="mainSeq">
+                <p:childTnLst>
+                  <p:par>
+                    <p:cTn id="3" fill="hold">
+                      <p:stCondLst>
+                        <p:cond delay="indefinite"/>
+                        <p:cond evt="onBegin" delay="0">
+                          <p:tn val="2"/>
+                        </p:cond>
+                      </p:stCondLst>
+                      <p:childTnLst>
+                        <p:par>
+                          <p:cTn id="4" fill="hold">
+                            <p:stCondLst>
+                              <p:cond delay="0"/>
+                            </p:stCondLst>
+                            <p:childTnLst>
+                              <p:par>
+                                <p:cTn id="5" presetID="15" presetClass="entr" presetSubtype="0" fill="hold" grpId="0" nodeType="afterEffect">
+                                  <p:stCondLst>
+                                    <p:cond delay="0"/>
+                                  </p:stCondLst>
+                                  <p:childTnLst>
+                                    <p:set>
+                                      <p:cBhvr>
+                                        <p:cTn id="6" dur="1" fill="hold">
+                                          <p:stCondLst>
+                                            <p:cond delay="0"/>
+                                          </p:stCondLst>
+                                        </p:cTn>
+                                        <p:tgtEl>
+                                          <p:spTgt spid="4"/>
+                                        </p:tgtEl>
+                                        <p:attrNameLst>
+                                          <p:attrName>style.visibility</p:attrName>
+                                        </p:attrNameLst>
+                                      </p:cBhvr>
+                                      <p:to>
+                                        <p:strVal val="visible"/>
+                                      </p:to>
+                                    </p:set>
+                                    <p:anim calcmode="lin" valueType="num">
+                                      <p:cBhvr>
+                                        <p:cTn id="7" dur="1000" fill="hold"/>
+                                        <p:tgtEl>
+                                          <p:spTgt spid="4"/>
+                                        </p:tgtEl>
+                                        <p:attrNameLst>
+                                          <p:attrName>ppt_w</p:attrName>
+                                        </p:attrNameLst>
+                                      </p:cBhvr>
+                                      <p:tavLst>
+                                        <p:tav tm="0">
+                                          <p:val>
+                                            <p:fltVal val="0"/>
+                                          </p:val>
+                                        </p:tav>
+                                        <p:tav tm="100000">
+                                          <p:val>
+                                            <p:strVal val="#ppt_w"/>
+                                          </p:val>
+                                        </p:tav>
+                                      </p:tavLst>
+                                    </p:anim>
+                                    <p:anim calcmode="lin" valueType="num">
+                                      <p:cBhvr>
+                                        <p:cTn id="8" dur="1000" fill="hold"/>
+                                        <p:tgtEl>
+                                          <p:spTgt spid="4"/>
+                                        </p:tgtEl>
+                                        <p:attrNameLst>
+                                          <p:attrName>ppt_h</p:attrName>
+                                        </p:attrNameLst>
+                                      </p:cBhvr>
+                                      <p:tavLst>
+                                        <p:tav tm="0">
+                                          <p:val>
+                                            <p:fltVal val="0"/>
+                                          </p:val>
+                                        </p:tav>
+                                        <p:tav tm="100000">
+                                          <p:val>
+                                            <p:strVal val="#ppt_h"/>
+                                          </p:val>
+                                        </p:tav>
+                                      </p:tavLst>
+                                    </p:anim>
+                                    <p:anim calcmode="lin" valueType="num">
+                                      <p:cBhvr>
+                                        <p:cTn id="9" dur="1000" fill="hold"/>
+                                        <p:tgtEl>
+                                          <p:spTgt spid="4"/>
+                                        </p:tgtEl>
+                                        <p:attrNameLst>
+                                          <p:attrName>ppt_x</p:attrName>
+                                        </p:attrNameLst>
+                                      </p:cBhvr>
+                                      <p:tavLst>
+                                        <p:tav tm="0" fmla="#ppt_x+(cos(-2*pi*(1-$))*-#ppt_x-sin(-2*pi*(1-$))*(1-#ppt_y))*(1-$)">
+                                          <p:val>
+                                            <p:fltVal val="0"/>
+                                          </p:val>
+                                        </p:tav>
+                                        <p:tav tm="100000">
+                                          <p:val>
+                                            <p:fltVal val="1"/>
+                                          </p:val>
+                                        </p:tav>
+                                      </p:tavLst>
+                                    </p:anim>
+                                    <p:anim calcmode="lin" valueType="num">
+                                      <p:cBhvr>
+                                        <p:cTn id="10" dur="1000" fill="hold"/>
+                                        <p:tgtEl>
+                                          <p:spTgt spid="4"/>
+                                        </p:tgtEl>
+                                        <p:attrNameLst>
+                                          <p:attrName>ppt_y</p:attrName>
+                                        </p:attrNameLst>
+                                      </p:cBhvr>
+                                      <p:tavLst>
+                                        <p:tav tm="0" fmla="#ppt_y+(sin(-2*pi*(1-$))*-#ppt_x+cos(-2*pi*(1-$))*(1-#ppt_y))*(1-$)">
+                                          <p:val>
+                                            <p:fltVal val="0"/>
+                                          </p:val>
+                                        </p:tav>
+                                        <p:tav tm="100000">
+                                          <p:val>
+                                            <p:fltVal val="1"/>
+                                          </p:val>
+                                        </p:tav>
+                                      </p:tavLst>
+                                    </p:anim>
+                                  </p:childTnLst>
+                                </p:cTn>
+                              </p:par>
+                            </p:childTnLst>
+                          </p:cTn>
+                        </p:par>
+                      </p:childTnLst>
+                    </p:cTn>
+                  </p:par>
+                </p:childTnLst>
+              </p:cTn>
+              <p:prevCondLst>
+                <p:cond evt="onPrev" delay="0">
+                  <p:tgtEl>
+                    <p:sldTgt/>
+                  </p:tgtEl>
+                </p:cond>
+              </p:prevCondLst>
+              <p:nextCondLst>
+                <p:cond evt="onNext" delay="0">
+                  <p:tgtEl>
+                    <p:sldTgt/>
+                  </p:tgtEl>
+                </p:cond>
+              </p:nextCondLst>
+            </p:seq>
+          </p:childTnLst>
+        </p:cTn>
+      </p:par>
+    </p:tnLst>
+    <p:bldLst>
+      <p:bldP spid="4" grpId="0"/>
+    </p:bldLst>
+  </p:timing>
+</p:sld>
+</file>
+
+<file path=ppt/slides/slide7.xml><?xml version="1.0" encoding="utf-8"?>
+<p:sld xmlns:a="http://schemas.openxmlformats.org/drawingml/2006/main" xmlns:r="http://schemas.openxmlformats.org/officeDocument/2006/relationships" xmlns:p="http://schemas.openxmlformats.org/presentationml/2006/main">
+  <p:cSld>
+    <p:spTree>
+      <p:nvGrpSpPr>
+        <p:cNvPr id="1" name=""/>
+        <p:cNvGrpSpPr/>
+        <p:nvPr/>
+      </p:nvGrpSpPr>
+      <p:grpSpPr>
+        <a:xfrm>
+          <a:off x="0" y="0"/>
+          <a:ext cx="0" cy="0"/>
+          <a:chOff x="0" y="0"/>
+          <a:chExt cx="0" cy="0"/>
+        </a:xfrm>
+      </p:grpSpPr>
+      <p:sp>
+        <p:nvSpPr>
+          <p:cNvPr id="2" name="Freeform 15">
+            <a:extLst>
+              <a:ext uri="{FF2B5EF4-FFF2-40B4-BE49-F238E27FC236}">
+                <a16:creationId xmlns:a16="http://schemas.microsoft.com/office/drawing/2014/main" id="{7956E56C-C3F1-4DDA-8C0D-5A3212DAD5CF}"/>
+              </a:ext>
+            </a:extLst>
+          </p:cNvPr>
+          <p:cNvSpPr>
+            <a:spLocks/>
+          </p:cNvSpPr>
+          <p:nvPr/>
+        </p:nvSpPr>
+        <p:spPr bwMode="auto">
+          <a:xfrm>
+            <a:off x="389654" y="391902"/>
+            <a:ext cx="487234" cy="562546"/>
+          </a:xfrm>
+          <a:custGeom>
+            <a:avLst/>
+            <a:gdLst>
+              <a:gd name="T0" fmla="*/ 0 w 1171"/>
+              <a:gd name="T1" fmla="*/ 1014 h 1352"/>
+              <a:gd name="T2" fmla="*/ 0 w 1171"/>
+              <a:gd name="T3" fmla="*/ 338 h 1352"/>
+              <a:gd name="T4" fmla="*/ 586 w 1171"/>
+              <a:gd name="T5" fmla="*/ 0 h 1352"/>
+              <a:gd name="T6" fmla="*/ 1171 w 1171"/>
+              <a:gd name="T7" fmla="*/ 338 h 1352"/>
+              <a:gd name="T8" fmla="*/ 1171 w 1171"/>
+              <a:gd name="T9" fmla="*/ 1014 h 1352"/>
+              <a:gd name="T10" fmla="*/ 586 w 1171"/>
+              <a:gd name="T11" fmla="*/ 1352 h 1352"/>
+              <a:gd name="T12" fmla="*/ 0 w 1171"/>
+              <a:gd name="T13" fmla="*/ 1014 h 1352"/>
+            </a:gdLst>
+            <a:ahLst/>
+            <a:cxnLst>
+              <a:cxn ang="0">
+                <a:pos x="T0" y="T1"/>
+              </a:cxn>
+              <a:cxn ang="0">
+                <a:pos x="T2" y="T3"/>
+              </a:cxn>
+              <a:cxn ang="0">
+                <a:pos x="T4" y="T5"/>
+              </a:cxn>
+              <a:cxn ang="0">
+                <a:pos x="T6" y="T7"/>
+              </a:cxn>
+              <a:cxn ang="0">
+                <a:pos x="T8" y="T9"/>
+              </a:cxn>
+              <a:cxn ang="0">
+                <a:pos x="T10" y="T11"/>
+              </a:cxn>
+              <a:cxn ang="0">
+                <a:pos x="T12" y="T13"/>
+              </a:cxn>
+            </a:cxnLst>
+            <a:rect l="0" t="0" r="r" b="b"/>
+            <a:pathLst>
+              <a:path w="1171" h="1352">
+                <a:moveTo>
+                  <a:pt x="0" y="1014"/>
+                </a:moveTo>
+                <a:lnTo>
+                  <a:pt x="0" y="338"/>
+                </a:lnTo>
+                <a:lnTo>
+                  <a:pt x="586" y="0"/>
+                </a:lnTo>
+                <a:lnTo>
+                  <a:pt x="1171" y="338"/>
+                </a:lnTo>
+                <a:lnTo>
+                  <a:pt x="1171" y="1014"/>
+                </a:lnTo>
+                <a:lnTo>
+                  <a:pt x="586" y="1352"/>
+                </a:lnTo>
+                <a:lnTo>
+                  <a:pt x="0" y="1014"/>
+                </a:lnTo>
+                <a:close/>
+              </a:path>
+            </a:pathLst>
+          </a:custGeom>
+          <a:solidFill>
+            <a:srgbClr val="2B3E54"/>
+          </a:solidFill>
+          <a:ln>
+            <a:noFill/>
+          </a:ln>
+        </p:spPr>
+        <p:txBody>
+          <a:bodyPr vert="horz" wrap="square" lIns="91440" tIns="45720" rIns="91440" bIns="45720" numCol="1" anchor="t" anchorCtr="0" compatLnSpc="1">
+            <a:prstTxWarp prst="textNoShape">
+              <a:avLst/>
+            </a:prstTxWarp>
+          </a:bodyPr>
+          <a:lstStyle/>
+          <a:p>
+            <a:endParaRPr lang="zh-CN" altLang="en-US" sz="2133" dirty="0">
+              <a:cs typeface="+mn-ea"/>
+              <a:sym typeface="+mn-lt"/>
+            </a:endParaRPr>
+          </a:p>
+        </p:txBody>
+      </p:sp>
+      <p:sp>
+        <p:nvSpPr>
+          <p:cNvPr id="4" name="文本框 8">
+            <a:extLst>
+              <a:ext uri="{FF2B5EF4-FFF2-40B4-BE49-F238E27FC236}">
+                <a16:creationId xmlns:a16="http://schemas.microsoft.com/office/drawing/2014/main" id="{EFA8AEF7-CAE9-495F-AC4C-2B1E9B3AA0F7}"/>
+              </a:ext>
+            </a:extLst>
+          </p:cNvPr>
+          <p:cNvSpPr txBox="1"/>
+          <p:nvPr/>
+        </p:nvSpPr>
+        <p:spPr>
+          <a:xfrm>
+            <a:off x="979906" y="471160"/>
             <a:ext cx="1710686" cy="461665"/>
           </a:xfrm>
           <a:prstGeom prst="rect">
@@ -27085,7 +28327,7 @@
 </p:sld>
 </file>
 
-<file path=ppt/slides/slide7.xml><?xml version="1.0" encoding="utf-8"?>
+<file path=ppt/slides/slide8.xml><?xml version="1.0" encoding="utf-8"?>
 <p:sld xmlns:a="http://schemas.openxmlformats.org/drawingml/2006/main" xmlns:r="http://schemas.openxmlformats.org/officeDocument/2006/relationships" xmlns:p="http://schemas.openxmlformats.org/presentationml/2006/main">
   <p:cSld>
     <p:spTree>
@@ -27776,7 +29018,7 @@
 </p:sld>
 </file>
 
-<file path=ppt/slides/slide8.xml><?xml version="1.0" encoding="utf-8"?>
+<file path=ppt/slides/slide9.xml><?xml version="1.0" encoding="utf-8"?>
 <p:sld xmlns:a="http://schemas.openxmlformats.org/drawingml/2006/main" xmlns:r="http://schemas.openxmlformats.org/officeDocument/2006/relationships" xmlns:p="http://schemas.openxmlformats.org/presentationml/2006/main">
   <p:cSld>
     <p:spTree>
@@ -28527,725 +29769,6 @@
       <p:bldP spid="4" grpId="0"/>
     </p:bldLst>
   </p:timing>
-</p:sld>
-</file>
-
-<file path=ppt/slides/slide9.xml><?xml version="1.0" encoding="utf-8"?>
-<p:sld xmlns:a="http://schemas.openxmlformats.org/drawingml/2006/main" xmlns:r="http://schemas.openxmlformats.org/officeDocument/2006/relationships" xmlns:p="http://schemas.openxmlformats.org/presentationml/2006/main">
-  <p:cSld>
-    <p:spTree>
-      <p:nvGrpSpPr>
-        <p:cNvPr id="1" name=""/>
-        <p:cNvGrpSpPr/>
-        <p:nvPr/>
-      </p:nvGrpSpPr>
-      <p:grpSpPr>
-        <a:xfrm>
-          <a:off x="0" y="0"/>
-          <a:ext cx="0" cy="0"/>
-          <a:chOff x="0" y="0"/>
-          <a:chExt cx="0" cy="0"/>
-        </a:xfrm>
-      </p:grpSpPr>
-      <p:sp>
-        <p:nvSpPr>
-          <p:cNvPr id="70" name="矩形 10"/>
-          <p:cNvSpPr>
-            <a:spLocks noChangeAspect="1"/>
-          </p:cNvSpPr>
-          <p:nvPr/>
-        </p:nvSpPr>
-        <p:spPr>
-          <a:xfrm>
-            <a:off x="4751851" y="1604797"/>
-            <a:ext cx="2496277" cy="2185899"/>
-          </a:xfrm>
-          <a:prstGeom prst="hexagon">
-            <a:avLst/>
-          </a:prstGeom>
-          <a:solidFill>
-            <a:srgbClr val="2B3E54"/>
-          </a:solidFill>
-          <a:ln w="15875">
-            <a:noFill/>
-          </a:ln>
-          <a:effectLst/>
-        </p:spPr>
-        <p:style>
-          <a:lnRef idx="2">
-            <a:schemeClr val="accent1">
-              <a:shade val="50000"/>
-            </a:schemeClr>
-          </a:lnRef>
-          <a:fillRef idx="1">
-            <a:schemeClr val="accent1"/>
-          </a:fillRef>
-          <a:effectRef idx="0">
-            <a:schemeClr val="accent1"/>
-          </a:effectRef>
-          <a:fontRef idx="minor">
-            <a:schemeClr val="lt1"/>
-          </a:fontRef>
-        </p:style>
-        <p:txBody>
-          <a:bodyPr anchor="ctr"/>
-          <a:lstStyle/>
-          <a:p>
-            <a:pPr algn="ctr"/>
-            <a:endParaRPr lang="zh-CN" altLang="en-US" sz="2400" dirty="0">
-              <a:solidFill>
-                <a:prstClr val="white"/>
-              </a:solidFill>
-              <a:cs typeface="+mn-ea"/>
-              <a:sym typeface="+mn-lt"/>
-            </a:endParaRPr>
-          </a:p>
-        </p:txBody>
-      </p:sp>
-      <p:sp>
-        <p:nvSpPr>
-          <p:cNvPr id="67" name="文本框 8"/>
-          <p:cNvSpPr>
-            <a:spLocks noChangeArrowheads="1"/>
-          </p:cNvSpPr>
-          <p:nvPr/>
-        </p:nvSpPr>
-        <p:spPr bwMode="auto">
-          <a:xfrm>
-            <a:off x="3270373" y="4188701"/>
-            <a:ext cx="6095299" cy="1733664"/>
-          </a:xfrm>
-          <a:prstGeom prst="rect">
-            <a:avLst/>
-          </a:prstGeom>
-          <a:noFill/>
-          <a:ln>
-            <a:noFill/>
-          </a:ln>
-          <a:effectLst/>
-          <a:extLst>
-            <a:ext uri="{909E8E84-426E-40DD-AFC4-6F175D3DCCD1}">
-              <a14:hiddenFill xmlns:a14="http://schemas.microsoft.com/office/drawing/2010/main">
-                <a:solidFill>
-                  <a:srgbClr val="FFFFFF"/>
-                </a:solidFill>
-              </a14:hiddenFill>
-            </a:ext>
-            <a:ext uri="{91240B29-F687-4F45-9708-019B960494DF}">
-              <a14:hiddenLine xmlns:a14="http://schemas.microsoft.com/office/drawing/2010/main" w="9525">
-                <a:solidFill>
-                  <a:srgbClr val="000000"/>
-                </a:solidFill>
-                <a:bevel/>
-                <a:headEnd/>
-                <a:tailEnd/>
-              </a14:hiddenLine>
-            </a:ext>
-          </a:extLst>
-        </p:spPr>
-        <p:txBody>
-          <a:bodyPr wrap="square" lIns="91421" tIns="45712" rIns="91421" bIns="45712">
-            <a:spAutoFit/>
-          </a:bodyPr>
-          <a:lstStyle/>
-          <a:p>
-            <a:pPr algn="ctr">
-              <a:defRPr/>
-            </a:pPr>
-            <a:r>
-              <a:rPr lang="zh-CN" altLang="en-US" sz="5333" b="1" kern="100" dirty="0">
-                <a:solidFill>
-                  <a:schemeClr val="tx1">
-                    <a:lumMod val="65000"/>
-                    <a:lumOff val="35000"/>
-                  </a:schemeClr>
-                </a:solidFill>
-                <a:cs typeface="+mn-ea"/>
-                <a:sym typeface="+mn-lt"/>
-              </a:rPr>
-              <a:t>环境变量与</a:t>
-            </a:r>
-            <a:endParaRPr lang="en-US" altLang="zh-CN" sz="5333" b="1" kern="100" dirty="0">
-              <a:solidFill>
-                <a:schemeClr val="tx1">
-                  <a:lumMod val="65000"/>
-                  <a:lumOff val="35000"/>
-                </a:schemeClr>
-              </a:solidFill>
-              <a:cs typeface="+mn-ea"/>
-              <a:sym typeface="+mn-lt"/>
-            </a:endParaRPr>
-          </a:p>
-          <a:p>
-            <a:pPr algn="ctr">
-              <a:defRPr/>
-            </a:pPr>
-            <a:r>
-              <a:rPr lang="en-US" altLang="zh-CN" sz="5333" b="1" kern="100" dirty="0">
-                <a:solidFill>
-                  <a:schemeClr val="tx1">
-                    <a:lumMod val="65000"/>
-                    <a:lumOff val="35000"/>
-                  </a:schemeClr>
-                </a:solidFill>
-                <a:cs typeface="+mn-ea"/>
-                <a:sym typeface="+mn-lt"/>
-              </a:rPr>
-              <a:t>C</a:t>
-            </a:r>
-            <a:r>
-              <a:rPr lang="zh-CN" altLang="en-US" sz="5333" b="1" kern="100" dirty="0">
-                <a:solidFill>
-                  <a:schemeClr val="tx1">
-                    <a:lumMod val="65000"/>
-                    <a:lumOff val="35000"/>
-                  </a:schemeClr>
-                </a:solidFill>
-                <a:cs typeface="+mn-ea"/>
-                <a:sym typeface="+mn-lt"/>
-              </a:rPr>
-              <a:t>语言编译器</a:t>
-            </a:r>
-            <a:endParaRPr lang="zh-CN" altLang="zh-CN" sz="3000" b="1" kern="100" dirty="0">
-              <a:solidFill>
-                <a:schemeClr val="tx1">
-                  <a:lumMod val="65000"/>
-                  <a:lumOff val="35000"/>
-                </a:schemeClr>
-              </a:solidFill>
-              <a:cs typeface="+mn-ea"/>
-              <a:sym typeface="+mn-lt"/>
-            </a:endParaRPr>
-          </a:p>
-        </p:txBody>
-      </p:sp>
-      <p:sp>
-        <p:nvSpPr>
-          <p:cNvPr id="71" name="矩形 10"/>
-          <p:cNvSpPr>
-            <a:spLocks noChangeAspect="1"/>
-          </p:cNvSpPr>
-          <p:nvPr/>
-        </p:nvSpPr>
-        <p:spPr>
-          <a:xfrm>
-            <a:off x="6483819" y="3263650"/>
-            <a:ext cx="956331" cy="837424"/>
-          </a:xfrm>
-          <a:prstGeom prst="hexagon">
-            <a:avLst/>
-          </a:prstGeom>
-          <a:solidFill>
-            <a:srgbClr val="2B3E54"/>
-          </a:solidFill>
-          <a:ln w="15875">
-            <a:gradFill>
-              <a:gsLst>
-                <a:gs pos="100000">
-                  <a:schemeClr val="bg1">
-                    <a:lumMod val="85000"/>
-                  </a:schemeClr>
-                </a:gs>
-                <a:gs pos="0">
-                  <a:schemeClr val="bg1"/>
-                </a:gs>
-              </a:gsLst>
-              <a:lin ang="8100000" scaled="0"/>
-            </a:gradFill>
-          </a:ln>
-          <a:effectLst/>
-        </p:spPr>
-        <p:style>
-          <a:lnRef idx="2">
-            <a:schemeClr val="accent1">
-              <a:shade val="50000"/>
-            </a:schemeClr>
-          </a:lnRef>
-          <a:fillRef idx="1">
-            <a:schemeClr val="accent1"/>
-          </a:fillRef>
-          <a:effectRef idx="0">
-            <a:schemeClr val="accent1"/>
-          </a:effectRef>
-          <a:fontRef idx="minor">
-            <a:schemeClr val="lt1"/>
-          </a:fontRef>
-        </p:style>
-        <p:txBody>
-          <a:bodyPr anchor="ctr"/>
-          <a:lstStyle/>
-          <a:p>
-            <a:pPr algn="ctr"/>
-            <a:endParaRPr lang="zh-CN" altLang="en-US" sz="2400" dirty="0">
-              <a:solidFill>
-                <a:prstClr val="white"/>
-              </a:solidFill>
-              <a:cs typeface="+mn-ea"/>
-              <a:sym typeface="+mn-lt"/>
-            </a:endParaRPr>
-          </a:p>
-        </p:txBody>
-      </p:sp>
-      <p:sp>
-        <p:nvSpPr>
-          <p:cNvPr id="74" name="TextBox 73"/>
-          <p:cNvSpPr txBox="1"/>
-          <p:nvPr/>
-        </p:nvSpPr>
-        <p:spPr>
-          <a:xfrm>
-            <a:off x="6563862" y="3351277"/>
-            <a:ext cx="745717" cy="666786"/>
-          </a:xfrm>
-          <a:prstGeom prst="rect">
-            <a:avLst/>
-          </a:prstGeom>
-          <a:noFill/>
-        </p:spPr>
-        <p:txBody>
-          <a:bodyPr wrap="none" rtlCol="0">
-            <a:spAutoFit/>
-          </a:bodyPr>
-          <a:lstStyle/>
-          <a:p>
-            <a:r>
-              <a:rPr lang="en-US" altLang="zh-CN" sz="3733" dirty="0">
-                <a:solidFill>
-                  <a:schemeClr val="bg1"/>
-                </a:solidFill>
-                <a:cs typeface="+mn-ea"/>
-                <a:sym typeface="+mn-lt"/>
-              </a:rPr>
-              <a:t>02</a:t>
-            </a:r>
-            <a:endParaRPr lang="zh-CN" altLang="en-US" sz="3733" dirty="0">
-              <a:solidFill>
-                <a:schemeClr val="bg1"/>
-              </a:solidFill>
-              <a:cs typeface="+mn-ea"/>
-              <a:sym typeface="+mn-lt"/>
-            </a:endParaRPr>
-          </a:p>
-        </p:txBody>
-      </p:sp>
-    </p:spTree>
-    <p:extLst>
-      <p:ext uri="{BB962C8B-B14F-4D97-AF65-F5344CB8AC3E}">
-        <p14:creationId xmlns:p14="http://schemas.microsoft.com/office/powerpoint/2010/main" val="2992375368"/>
-      </p:ext>
-    </p:extLst>
-  </p:cSld>
-  <p:clrMapOvr>
-    <a:masterClrMapping/>
-  </p:clrMapOvr>
-  <mc:AlternateContent xmlns:mc="http://schemas.openxmlformats.org/markup-compatibility/2006" xmlns:p14="http://schemas.microsoft.com/office/powerpoint/2010/main">
-    <mc:Choice Requires="p14">
-      <p:transition spd="slow" p14:dur="1600" advTm="1481">
-        <p:blinds dir="vert"/>
-      </p:transition>
-    </mc:Choice>
-    <mc:Fallback xmlns="">
-      <p:transition spd="slow" advTm="1481">
-        <p:blinds dir="vert"/>
-      </p:transition>
-    </mc:Fallback>
-  </mc:AlternateContent>
-  <mc:AlternateContent xmlns:mc="http://schemas.openxmlformats.org/markup-compatibility/2006" xmlns:p14="http://schemas.microsoft.com/office/powerpoint/2010/main">
-    <mc:Choice Requires="p14">
-      <p:timing>
-        <p:tnLst>
-          <p:par>
-            <p:cTn id="1" dur="indefinite" restart="never" nodeType="tmRoot">
-              <p:childTnLst>
-                <p:seq concurrent="1" nextAc="seek">
-                  <p:cTn id="2" dur="indefinite" nodeType="mainSeq">
-                    <p:childTnLst>
-                      <p:par>
-                        <p:cTn id="3" fill="hold">
-                          <p:stCondLst>
-                            <p:cond delay="indefinite"/>
-                            <p:cond evt="onBegin" delay="0">
-                              <p:tn val="2"/>
-                            </p:cond>
-                          </p:stCondLst>
-                          <p:childTnLst>
-                            <p:par>
-                              <p:cTn id="4" fill="hold">
-                                <p:stCondLst>
-                                  <p:cond delay="0"/>
-                                </p:stCondLst>
-                                <p:childTnLst>
-                                  <p:par>
-                                    <p:cTn id="5" presetID="2" presetClass="entr" presetSubtype="12" fill="hold" grpId="0" nodeType="afterEffect" p14:presetBounceEnd="50000">
-                                      <p:stCondLst>
-                                        <p:cond delay="0"/>
-                                      </p:stCondLst>
-                                      <p:childTnLst>
-                                        <p:set>
-                                          <p:cBhvr>
-                                            <p:cTn id="6" dur="1" fill="hold">
-                                              <p:stCondLst>
-                                                <p:cond delay="0"/>
-                                              </p:stCondLst>
-                                            </p:cTn>
-                                            <p:tgtEl>
-                                              <p:spTgt spid="70"/>
-                                            </p:tgtEl>
-                                            <p:attrNameLst>
-                                              <p:attrName>style.visibility</p:attrName>
-                                            </p:attrNameLst>
-                                          </p:cBhvr>
-                                          <p:to>
-                                            <p:strVal val="visible"/>
-                                          </p:to>
-                                        </p:set>
-                                        <p:anim calcmode="lin" valueType="num" p14:bounceEnd="50000">
-                                          <p:cBhvr additive="base">
-                                            <p:cTn id="7" dur="1500" fill="hold"/>
-                                            <p:tgtEl>
-                                              <p:spTgt spid="70"/>
-                                            </p:tgtEl>
-                                            <p:attrNameLst>
-                                              <p:attrName>ppt_x</p:attrName>
-                                            </p:attrNameLst>
-                                          </p:cBhvr>
-                                          <p:tavLst>
-                                            <p:tav tm="0">
-                                              <p:val>
-                                                <p:strVal val="0-#ppt_w/2"/>
-                                              </p:val>
-                                            </p:tav>
-                                            <p:tav tm="100000">
-                                              <p:val>
-                                                <p:strVal val="#ppt_x"/>
-                                              </p:val>
-                                            </p:tav>
-                                          </p:tavLst>
-                                        </p:anim>
-                                        <p:anim calcmode="lin" valueType="num" p14:bounceEnd="50000">
-                                          <p:cBhvr additive="base">
-                                            <p:cTn id="8" dur="1500" fill="hold"/>
-                                            <p:tgtEl>
-                                              <p:spTgt spid="70"/>
-                                            </p:tgtEl>
-                                            <p:attrNameLst>
-                                              <p:attrName>ppt_y</p:attrName>
-                                            </p:attrNameLst>
-                                          </p:cBhvr>
-                                          <p:tavLst>
-                                            <p:tav tm="0">
-                                              <p:val>
-                                                <p:strVal val="1+#ppt_h/2"/>
-                                              </p:val>
-                                            </p:tav>
-                                            <p:tav tm="100000">
-                                              <p:val>
-                                                <p:strVal val="#ppt_y"/>
-                                              </p:val>
-                                            </p:tav>
-                                          </p:tavLst>
-                                        </p:anim>
-                                      </p:childTnLst>
-                                    </p:cTn>
-                                  </p:par>
-                                </p:childTnLst>
-                              </p:cTn>
-                            </p:par>
-                            <p:par>
-                              <p:cTn id="9" fill="hold">
-                                <p:stCondLst>
-                                  <p:cond delay="1500"/>
-                                </p:stCondLst>
-                                <p:childTnLst>
-                                  <p:par>
-                                    <p:cTn id="10" presetID="12" presetClass="entr" presetSubtype="4" fill="hold" grpId="0" nodeType="afterEffect">
-                                      <p:stCondLst>
-                                        <p:cond delay="0"/>
-                                      </p:stCondLst>
-                                      <p:childTnLst>
-                                        <p:set>
-                                          <p:cBhvr>
-                                            <p:cTn id="11" dur="1" fill="hold">
-                                              <p:stCondLst>
-                                                <p:cond delay="0"/>
-                                              </p:stCondLst>
-                                            </p:cTn>
-                                            <p:tgtEl>
-                                              <p:spTgt spid="67"/>
-                                            </p:tgtEl>
-                                            <p:attrNameLst>
-                                              <p:attrName>style.visibility</p:attrName>
-                                            </p:attrNameLst>
-                                          </p:cBhvr>
-                                          <p:to>
-                                            <p:strVal val="visible"/>
-                                          </p:to>
-                                        </p:set>
-                                        <p:anim calcmode="lin" valueType="num">
-                                          <p:cBhvr>
-                                            <p:cTn id="12" dur="500"/>
-                                            <p:tgtEl>
-                                              <p:spTgt spid="67"/>
-                                            </p:tgtEl>
-                                            <p:attrNameLst>
-                                              <p:attrName>ppt_y</p:attrName>
-                                            </p:attrNameLst>
-                                          </p:cBhvr>
-                                          <p:tavLst>
-                                            <p:tav tm="0">
-                                              <p:val>
-                                                <p:strVal val="#ppt_y+#ppt_h*1.125000"/>
-                                              </p:val>
-                                            </p:tav>
-                                            <p:tav tm="100000">
-                                              <p:val>
-                                                <p:strVal val="#ppt_y"/>
-                                              </p:val>
-                                            </p:tav>
-                                          </p:tavLst>
-                                        </p:anim>
-                                        <p:animEffect>
-                                          <p:cBhvr>
-                                            <p:cTn id="13" dur="500"/>
-                                            <p:tgtEl>
-                                              <p:spTgt spid="67"/>
-                                            </p:tgtEl>
-                                          </p:cBhvr>
-                                        </p:animEffect>
-                                      </p:childTnLst>
-                                    </p:cTn>
-                                  </p:par>
-                                </p:childTnLst>
-                              </p:cTn>
-                            </p:par>
-                          </p:childTnLst>
-                        </p:cTn>
-                      </p:par>
-                    </p:childTnLst>
-                  </p:cTn>
-                  <p:prevCondLst>
-                    <p:cond evt="onPrev" delay="0">
-                      <p:tgtEl>
-                        <p:sldTgt/>
-                      </p:tgtEl>
-                    </p:cond>
-                  </p:prevCondLst>
-                  <p:nextCondLst>
-                    <p:cond evt="onNext" delay="0">
-                      <p:tgtEl>
-                        <p:sldTgt/>
-                      </p:tgtEl>
-                    </p:cond>
-                  </p:nextCondLst>
-                </p:seq>
-              </p:childTnLst>
-            </p:cTn>
-          </p:par>
-        </p:tnLst>
-        <p:bldLst>
-          <p:bldP spid="70" grpId="0" animBg="1"/>
-          <p:bldP spid="67" grpId="0" bldLvl="0" autoUpdateAnimBg="0"/>
-        </p:bldLst>
-      </p:timing>
-    </mc:Choice>
-    <mc:Fallback xmlns="">
-      <p:timing>
-        <p:tnLst>
-          <p:par>
-            <p:cTn id="1" dur="indefinite" restart="never" nodeType="tmRoot">
-              <p:childTnLst>
-                <p:seq concurrent="1" nextAc="seek">
-                  <p:cTn id="2" dur="indefinite" nodeType="mainSeq">
-                    <p:childTnLst>
-                      <p:par>
-                        <p:cTn id="3" fill="hold">
-                          <p:stCondLst>
-                            <p:cond delay="indefinite"/>
-                            <p:cond evt="onBegin" delay="0">
-                              <p:tn val="2"/>
-                            </p:cond>
-                          </p:stCondLst>
-                          <p:childTnLst>
-                            <p:par>
-                              <p:cTn id="4" fill="hold">
-                                <p:stCondLst>
-                                  <p:cond delay="0"/>
-                                </p:stCondLst>
-                                <p:childTnLst>
-                                  <p:par>
-                                    <p:cTn id="5" presetID="2" presetClass="entr" presetSubtype="12" fill="hold" grpId="0" nodeType="afterEffect">
-                                      <p:stCondLst>
-                                        <p:cond delay="0"/>
-                                      </p:stCondLst>
-                                      <p:childTnLst>
-                                        <p:set>
-                                          <p:cBhvr>
-                                            <p:cTn id="6" dur="1" fill="hold">
-                                              <p:stCondLst>
-                                                <p:cond delay="0"/>
-                                              </p:stCondLst>
-                                            </p:cTn>
-                                            <p:tgtEl>
-                                              <p:spTgt spid="70"/>
-                                            </p:tgtEl>
-                                            <p:attrNameLst>
-                                              <p:attrName>style.visibility</p:attrName>
-                                            </p:attrNameLst>
-                                          </p:cBhvr>
-                                          <p:to>
-                                            <p:strVal val="visible"/>
-                                          </p:to>
-                                        </p:set>
-                                        <p:anim calcmode="lin" valueType="num">
-                                          <p:cBhvr additive="base">
-                                            <p:cTn id="7" dur="1500" fill="hold"/>
-                                            <p:tgtEl>
-                                              <p:spTgt spid="70"/>
-                                            </p:tgtEl>
-                                            <p:attrNameLst>
-                                              <p:attrName>ppt_x</p:attrName>
-                                            </p:attrNameLst>
-                                          </p:cBhvr>
-                                          <p:tavLst>
-                                            <p:tav tm="0">
-                                              <p:val>
-                                                <p:strVal val="0-#ppt_w/2"/>
-                                              </p:val>
-                                            </p:tav>
-                                            <p:tav tm="100000">
-                                              <p:val>
-                                                <p:strVal val="#ppt_x"/>
-                                              </p:val>
-                                            </p:tav>
-                                          </p:tavLst>
-                                        </p:anim>
-                                        <p:anim calcmode="lin" valueType="num">
-                                          <p:cBhvr additive="base">
-                                            <p:cTn id="8" dur="1500" fill="hold"/>
-                                            <p:tgtEl>
-                                              <p:spTgt spid="70"/>
-                                            </p:tgtEl>
-                                            <p:attrNameLst>
-                                              <p:attrName>ppt_y</p:attrName>
-                                            </p:attrNameLst>
-                                          </p:cBhvr>
-                                          <p:tavLst>
-                                            <p:tav tm="0">
-                                              <p:val>
-                                                <p:strVal val="1+#ppt_h/2"/>
-                                              </p:val>
-                                            </p:tav>
-                                            <p:tav tm="100000">
-                                              <p:val>
-                                                <p:strVal val="#ppt_y"/>
-                                              </p:val>
-                                            </p:tav>
-                                          </p:tavLst>
-                                        </p:anim>
-                                      </p:childTnLst>
-                                    </p:cTn>
-                                  </p:par>
-                                </p:childTnLst>
-                              </p:cTn>
-                            </p:par>
-                            <p:par>
-                              <p:cTn id="9" fill="hold">
-                                <p:stCondLst>
-                                  <p:cond delay="1500"/>
-                                </p:stCondLst>
-                                <p:childTnLst>
-                                  <p:par>
-                                    <p:cTn id="10" presetID="12" presetClass="entr" presetSubtype="4" fill="hold" grpId="0" nodeType="afterEffect">
-                                      <p:stCondLst>
-                                        <p:cond delay="0"/>
-                                      </p:stCondLst>
-                                      <p:childTnLst>
-                                        <p:set>
-                                          <p:cBhvr>
-                                            <p:cTn id="11" dur="1" fill="hold">
-                                              <p:stCondLst>
-                                                <p:cond delay="0"/>
-                                              </p:stCondLst>
-                                            </p:cTn>
-                                            <p:tgtEl>
-                                              <p:spTgt spid="67"/>
-                                            </p:tgtEl>
-                                            <p:attrNameLst>
-                                              <p:attrName>style.visibility</p:attrName>
-                                            </p:attrNameLst>
-                                          </p:cBhvr>
-                                          <p:to>
-                                            <p:strVal val="visible"/>
-                                          </p:to>
-                                        </p:set>
-                                        <p:anim calcmode="lin" valueType="num">
-                                          <p:cBhvr>
-                                            <p:cTn id="12" dur="500"/>
-                                            <p:tgtEl>
-                                              <p:spTgt spid="67"/>
-                                            </p:tgtEl>
-                                            <p:attrNameLst>
-                                              <p:attrName>ppt_y</p:attrName>
-                                            </p:attrNameLst>
-                                          </p:cBhvr>
-                                          <p:tavLst>
-                                            <p:tav tm="0">
-                                              <p:val>
-                                                <p:strVal val="#ppt_y+#ppt_h*1.125000"/>
-                                              </p:val>
-                                            </p:tav>
-                                            <p:tav tm="100000">
-                                              <p:val>
-                                                <p:strVal val="#ppt_y"/>
-                                              </p:val>
-                                            </p:tav>
-                                          </p:tavLst>
-                                        </p:anim>
-                                        <p:animEffect>
-                                          <p:cBhvr>
-                                            <p:cTn id="13" dur="500"/>
-                                            <p:tgtEl>
-                                              <p:spTgt spid="67"/>
-                                            </p:tgtEl>
-                                          </p:cBhvr>
-                                        </p:animEffect>
-                                      </p:childTnLst>
-                                    </p:cTn>
-                                  </p:par>
-                                </p:childTnLst>
-                              </p:cTn>
-                            </p:par>
-                          </p:childTnLst>
-                        </p:cTn>
-                      </p:par>
-                    </p:childTnLst>
-                  </p:cTn>
-                  <p:prevCondLst>
-                    <p:cond evt="onPrev" delay="0">
-                      <p:tgtEl>
-                        <p:sldTgt/>
-                      </p:tgtEl>
-                    </p:cond>
-                  </p:prevCondLst>
-                  <p:nextCondLst>
-                    <p:cond evt="onNext" delay="0">
-                      <p:tgtEl>
-                        <p:sldTgt/>
-                      </p:tgtEl>
-                    </p:cond>
-                  </p:nextCondLst>
-                </p:seq>
-              </p:childTnLst>
-            </p:cTn>
-          </p:par>
-        </p:tnLst>
-        <p:bldLst>
-          <p:bldP spid="70" grpId="0" animBg="1"/>
-          <p:bldP spid="67" grpId="0" bldLvl="0" autoUpdateAnimBg="0"/>
-        </p:bldLst>
-      </p:timing>
-    </mc:Fallback>
-  </mc:AlternateContent>
 </p:sld>
 </file>
 
